--- a/docs/plans/sim2real-transfer-pipeline.pptx
+++ b/docs/plans/sim2real-transfer-pipeline.pptx
@@ -4,6 +4,9 @@
   <p:sldMasterIdLst>
     <p:sldMasterId id="2147483648" r:id="rId1"/>
   </p:sldMasterIdLst>
+  <p:notesMasterIdLst>
+    <p:notesMasterId r:id="rId18"/>
+  </p:notesMasterIdLst>
   <p:sldIdLst>
     <p:sldId id="256" r:id="rId2"/>
     <p:sldId id="257" r:id="rId3"/>
@@ -22,10 +25,7 @@
     <p:sldId id="270" r:id="rId16"/>
     <p:sldId id="271" r:id="rId17"/>
   </p:sldIdLst>
-  <p:notesMasterIdLst>
-    <p:notesMasterId r:id="rId18"/>
-  </p:notesMasterIdLst>
-  <p:sldSz cx="9144000" cy="5143500"/>
+  <p:sldSz cx="9144000" cy="5143500" type="screen16x9"/>
   <p:notesSz cx="5143500" cy="9144000"/>
   <p:defaultTextStyle>
     <a:lvl1pPr marL="0" algn="l" defTabSz="914400" rtl="0" eaLnBrk="1" latinLnBrk="0" hangingPunct="1">
@@ -119,6 +119,11 @@
       </a:defRPr>
     </a:lvl9pPr>
   </p:defaultTextStyle>
+  <p:extLst>
+    <p:ext uri="{EFAFB233-063F-42B5-8137-9DF3F51BA10A}">
+      <p15:sldGuideLst xmlns:p15="http://schemas.microsoft.com/office/powerpoint/2012/main"/>
+    </p:ext>
+  </p:extLst>
 </p:presentation>
 </file>
 
@@ -144,234 +149,10 @@
           <a:chExt cx="0" cy="0"/>
         </a:xfrm>
       </p:grpSpPr>
-      <p:sp>
-        <p:nvSpPr>
-          <p:cNvPr id="2" name="Header Placeholder 1"/>
-          <p:cNvSpPr>
-            <a:spLocks noGrp="1"/>
-          </p:cNvSpPr>
-          <p:nvPr>
-            <p:ph type="hdr" sz="quarter"/>
-          </p:nvPr>
-        </p:nvSpPr>
-        <p:spPr>
-          <a:xfrm>
-            <a:off x="0" y="0"/>
-            <a:ext cx="2971800" cy="458788"/>
-          </a:xfrm>
-          <a:prstGeom prst="rect">
-            <a:avLst/>
-          </a:prstGeom>
-        </p:spPr>
-        <p:txBody>
-          <a:bodyPr vert="horz" lIns="91440" tIns="45720" rIns="91440" bIns="45720" rtlCol="0"/>
-          <a:lstStyle>
-            <a:lvl1pPr algn="l">
-              <a:defRPr sz="1200"/>
-            </a:lvl1pPr>
-          </a:lstStyle>
-          <a:p>
-            <a:endParaRPr lang="en-US"/>
-          </a:p>
-        </p:txBody>
-      </p:sp>
-      <p:sp>
-        <p:nvSpPr>
-          <p:cNvPr id="3" name="Date Placeholder 2"/>
-          <p:cNvSpPr>
-            <a:spLocks noGrp="1"/>
-          </p:cNvSpPr>
-          <p:nvPr>
-            <p:ph type="dt" idx="1"/>
-          </p:nvPr>
-        </p:nvSpPr>
-        <p:spPr>
-          <a:xfrm>
-            <a:off x="3884613" y="0"/>
-            <a:ext cx="2971800" cy="458788"/>
-          </a:xfrm>
-          <a:prstGeom prst="rect">
-            <a:avLst/>
-          </a:prstGeom>
-        </p:spPr>
-        <p:txBody>
-          <a:bodyPr vert="horz" lIns="91440" tIns="45720" rIns="91440" bIns="45720" rtlCol="0"/>
-          <a:lstStyle>
-            <a:lvl1pPr algn="r">
-              <a:defRPr sz="1200"/>
-            </a:lvl1pPr>
-          </a:lstStyle>
-          <a:p>
-            <a:fld id="{5282F153-3F37-0F45-9E97-73ACFA13230C}" type="datetimeFigureOut">
-              <a:rPr lang="en-US"/>
-              <a:t>7/23/19</a:t>
-            </a:fld>
-            <a:endParaRPr lang="en-US"/>
-          </a:p>
-        </p:txBody>
-      </p:sp>
-      <p:sp>
-        <p:nvSpPr>
-          <p:cNvPr id="4" name="Slide Image Placeholder 3"/>
-          <p:cNvSpPr>
-            <a:spLocks noGrp="1" noRot="1" noChangeAspect="1"/>
-          </p:cNvSpPr>
-          <p:nvPr>
-            <p:ph type="sldImg" idx="2"/>
-          </p:nvPr>
-        </p:nvSpPr>
-        <p:spPr>
-          <a:xfrm>
-            <a:off x="685800" y="1143000"/>
-            <a:ext cx="5486400" cy="3086100"/>
-          </a:xfrm>
-          <a:prstGeom prst="rect">
-            <a:avLst/>
-          </a:prstGeom>
-          <a:noFill/>
-          <a:ln w="12700">
-            <a:solidFill>
-              <a:prstClr val="black"/>
-            </a:solidFill>
-          </a:ln>
-        </p:spPr>
-        <p:txBody>
-          <a:bodyPr vert="horz" lIns="91440" tIns="45720" rIns="91440" bIns="45720" rtlCol="0" anchor="ctr"/>
-          <a:lstStyle/>
-          <a:p>
-            <a:endParaRPr lang="en-US"/>
-          </a:p>
-        </p:txBody>
-      </p:sp>
-      <p:sp>
-        <p:nvSpPr>
-          <p:cNvPr id="5" name="Notes Placeholder 4"/>
-          <p:cNvSpPr>
-            <a:spLocks noGrp="1"/>
-          </p:cNvSpPr>
-          <p:nvPr>
-            <p:ph type="body" sz="quarter" idx="3"/>
-          </p:nvPr>
-        </p:nvSpPr>
-        <p:spPr>
-          <a:xfrm>
-            <a:off x="685800" y="4400550"/>
-            <a:ext cx="5486400" cy="3600450"/>
-          </a:xfrm>
-          <a:prstGeom prst="rect">
-            <a:avLst/>
-          </a:prstGeom>
-        </p:spPr>
-        <p:txBody>
-          <a:bodyPr vert="horz" lIns="91440" tIns="45720" rIns="91440" bIns="45720" rtlCol="0"/>
-          <a:lstStyle/>
-          <a:p>
-            <a:pPr lvl="0"/>
-            <a:r>
-              <a:rPr lang="en-US"/>
-              <a:t>Click to edit Master text styles</a:t>
-            </a:r>
-          </a:p>
-          <a:p>
-            <a:pPr lvl="1"/>
-            <a:r>
-              <a:rPr lang="en-US"/>
-              <a:t>Second level</a:t>
-            </a:r>
-          </a:p>
-          <a:p>
-            <a:pPr lvl="2"/>
-            <a:r>
-              <a:rPr lang="en-US"/>
-              <a:t>Third level</a:t>
-            </a:r>
-          </a:p>
-          <a:p>
-            <a:pPr lvl="3"/>
-            <a:r>
-              <a:rPr lang="en-US"/>
-              <a:t>Fourth level</a:t>
-            </a:r>
-          </a:p>
-          <a:p>
-            <a:pPr lvl="4"/>
-            <a:r>
-              <a:rPr lang="en-US"/>
-              <a:t>Fifth level</a:t>
-            </a:r>
-          </a:p>
-        </p:txBody>
-      </p:sp>
-      <p:sp>
-        <p:nvSpPr>
-          <p:cNvPr id="6" name="Footer Placeholder 5"/>
-          <p:cNvSpPr>
-            <a:spLocks noGrp="1"/>
-          </p:cNvSpPr>
-          <p:nvPr>
-            <p:ph type="ftr" sz="quarter" idx="4"/>
-          </p:nvPr>
-        </p:nvSpPr>
-        <p:spPr>
-          <a:xfrm>
-            <a:off x="0" y="8685213"/>
-            <a:ext cx="2971800" cy="458787"/>
-          </a:xfrm>
-          <a:prstGeom prst="rect">
-            <a:avLst/>
-          </a:prstGeom>
-        </p:spPr>
-        <p:txBody>
-          <a:bodyPr vert="horz" lIns="91440" tIns="45720" rIns="91440" bIns="45720" rtlCol="0" anchor="b"/>
-          <a:lstStyle>
-            <a:lvl1pPr algn="l">
-              <a:defRPr sz="1200"/>
-            </a:lvl1pPr>
-          </a:lstStyle>
-          <a:p>
-            <a:endParaRPr lang="en-US"/>
-          </a:p>
-        </p:txBody>
-      </p:sp>
-      <p:sp>
-        <p:nvSpPr>
-          <p:cNvPr id="7" name="Slide Number Placeholder 6"/>
-          <p:cNvSpPr>
-            <a:spLocks noGrp="1"/>
-          </p:cNvSpPr>
-          <p:nvPr>
-            <p:ph type="sldNum" sz="quarter" idx="5"/>
-          </p:nvPr>
-        </p:nvSpPr>
-        <p:spPr>
-          <a:xfrm>
-            <a:off x="3884613" y="8685213"/>
-            <a:ext cx="2971800" cy="458787"/>
-          </a:xfrm>
-          <a:prstGeom prst="rect">
-            <a:avLst/>
-          </a:prstGeom>
-        </p:spPr>
-        <p:txBody>
-          <a:bodyPr vert="horz" lIns="91440" tIns="45720" rIns="91440" bIns="45720" rtlCol="0" anchor="b"/>
-          <a:lstStyle>
-            <a:lvl1pPr algn="r">
-              <a:defRPr sz="1200"/>
-            </a:lvl1pPr>
-          </a:lstStyle>
-          <a:p>
-            <a:fld id="{CE5E9CC1-C706-0F49-92D6-E571CC5EEA8F}" type="slidenum">
-              <a:rPr lang="en-US"/>
-              <a:t>‹#›</a:t>
-            </a:fld>
-            <a:endParaRPr lang="en-US"/>
-          </a:p>
-        </p:txBody>
-      </p:sp>
     </p:spTree>
     <p:extLst>
       <p:ext uri="{BB962C8B-B14F-4D97-AF65-F5344CB8AC3E}">
-        <p14:creationId xmlns:p14="http://schemas.microsoft.com/office/powerpoint/2010/main" val="1024086991"/>
+        <p14:creationId xmlns:p14="http://schemas.microsoft.com/office/powerpoint/2010/main" val="1477482200"/>
       </p:ext>
     </p:extLst>
   </p:cSld>
@@ -515,10 +296,6 @@
           <a:bodyPr/>
           <a:lstStyle/>
           <a:p>
-            <a:r>
-              <a:rPr lang="en-US" dirty="0"/>
-              <a:t/>
-            </a:r>
             <a:endParaRPr lang="en-US" dirty="0"/>
           </a:p>
         </p:txBody>
@@ -603,10 +380,6 @@
           <a:bodyPr/>
           <a:lstStyle/>
           <a:p>
-            <a:r>
-              <a:rPr lang="en-US" dirty="0"/>
-              <a:t/>
-            </a:r>
             <a:endParaRPr lang="en-US" dirty="0"/>
           </a:p>
         </p:txBody>
@@ -691,10 +464,6 @@
           <a:bodyPr/>
           <a:lstStyle/>
           <a:p>
-            <a:r>
-              <a:rPr lang="en-US" dirty="0"/>
-              <a:t/>
-            </a:r>
             <a:endParaRPr lang="en-US" dirty="0"/>
           </a:p>
         </p:txBody>
@@ -779,10 +548,6 @@
           <a:bodyPr/>
           <a:lstStyle/>
           <a:p>
-            <a:r>
-              <a:rPr lang="en-US" dirty="0"/>
-              <a:t/>
-            </a:r>
             <a:endParaRPr lang="en-US" dirty="0"/>
           </a:p>
         </p:txBody>
@@ -867,10 +632,6 @@
           <a:bodyPr/>
           <a:lstStyle/>
           <a:p>
-            <a:r>
-              <a:rPr lang="en-US" dirty="0"/>
-              <a:t/>
-            </a:r>
             <a:endParaRPr lang="en-US" dirty="0"/>
           </a:p>
         </p:txBody>
@@ -955,10 +716,6 @@
           <a:bodyPr/>
           <a:lstStyle/>
           <a:p>
-            <a:r>
-              <a:rPr lang="en-US" dirty="0"/>
-              <a:t/>
-            </a:r>
             <a:endParaRPr lang="en-US" dirty="0"/>
           </a:p>
         </p:txBody>
@@ -1043,10 +800,6 @@
           <a:bodyPr/>
           <a:lstStyle/>
           <a:p>
-            <a:r>
-              <a:rPr lang="en-US" dirty="0"/>
-              <a:t/>
-            </a:r>
             <a:endParaRPr lang="en-US" dirty="0"/>
           </a:p>
         </p:txBody>
@@ -1131,10 +884,6 @@
           <a:bodyPr/>
           <a:lstStyle/>
           <a:p>
-            <a:r>
-              <a:rPr lang="en-US" dirty="0"/>
-              <a:t/>
-            </a:r>
             <a:endParaRPr lang="en-US" dirty="0"/>
           </a:p>
         </p:txBody>
@@ -1219,10 +968,6 @@
           <a:bodyPr/>
           <a:lstStyle/>
           <a:p>
-            <a:r>
-              <a:rPr lang="en-US" dirty="0"/>
-              <a:t/>
-            </a:r>
             <a:endParaRPr lang="en-US" dirty="0"/>
           </a:p>
         </p:txBody>
@@ -1307,10 +1052,6 @@
           <a:bodyPr/>
           <a:lstStyle/>
           <a:p>
-            <a:r>
-              <a:rPr lang="en-US" dirty="0"/>
-              <a:t/>
-            </a:r>
             <a:endParaRPr lang="en-US" dirty="0"/>
           </a:p>
         </p:txBody>
@@ -1395,10 +1136,6 @@
           <a:bodyPr/>
           <a:lstStyle/>
           <a:p>
-            <a:r>
-              <a:rPr lang="en-US" dirty="0"/>
-              <a:t/>
-            </a:r>
             <a:endParaRPr lang="en-US" dirty="0"/>
           </a:p>
         </p:txBody>
@@ -1483,10 +1220,6 @@
           <a:bodyPr/>
           <a:lstStyle/>
           <a:p>
-            <a:r>
-              <a:rPr lang="en-US" dirty="0"/>
-              <a:t/>
-            </a:r>
             <a:endParaRPr lang="en-US" dirty="0"/>
           </a:p>
         </p:txBody>
@@ -1571,10 +1304,6 @@
           <a:bodyPr/>
           <a:lstStyle/>
           <a:p>
-            <a:r>
-              <a:rPr lang="en-US" dirty="0"/>
-              <a:t/>
-            </a:r>
             <a:endParaRPr lang="en-US" dirty="0"/>
           </a:p>
         </p:txBody>
@@ -1659,10 +1388,6 @@
           <a:bodyPr/>
           <a:lstStyle/>
           <a:p>
-            <a:r>
-              <a:rPr lang="en-US" dirty="0"/>
-              <a:t/>
-            </a:r>
             <a:endParaRPr lang="en-US" dirty="0"/>
           </a:p>
         </p:txBody>
@@ -1747,10 +1472,6 @@
           <a:bodyPr/>
           <a:lstStyle/>
           <a:p>
-            <a:r>
-              <a:rPr lang="en-US" dirty="0"/>
-              <a:t/>
-            </a:r>
             <a:endParaRPr lang="en-US" dirty="0"/>
           </a:p>
         </p:txBody>
@@ -1835,10 +1556,6 @@
           <a:bodyPr/>
           <a:lstStyle/>
           <a:p>
-            <a:r>
-              <a:rPr lang="en-US" dirty="0"/>
-              <a:t/>
-            </a:r>
             <a:endParaRPr lang="en-US" dirty="0"/>
           </a:p>
         </p:txBody>
@@ -1912,6 +1629,11 @@
 <file path=ppt/slideMasters/slideMaster1.xml><?xml version="1.0" encoding="utf-8"?>
 <p:sldMaster xmlns:a="http://schemas.openxmlformats.org/drawingml/2006/main" xmlns:r="http://schemas.openxmlformats.org/officeDocument/2006/relationships" xmlns:p="http://schemas.openxmlformats.org/presentationml/2006/main">
   <p:cSld>
+    <p:bg>
+      <p:bgRef idx="1001">
+        <a:schemeClr val="bg1"/>
+      </p:bgRef>
+    </p:bg>
     <p:spTree>
       <p:nvGrpSpPr>
         <p:cNvPr id="1" name=""/>
@@ -2194,6 +1916,7 @@
         <a:solidFill>
           <a:srgbClr val="0A1420"/>
         </a:solidFill>
+        <a:effectLst/>
       </p:bgPr>
     </p:bg>
     <p:spTree>
@@ -2229,6 +1952,13 @@
           </a:solidFill>
           <a:ln/>
         </p:spPr>
+        <p:txBody>
+          <a:bodyPr/>
+          <a:lstStyle/>
+          <a:p>
+            <a:endParaRPr lang="en-US"/>
+          </a:p>
+        </p:txBody>
       </p:sp>
       <p:sp>
         <p:nvSpPr>
@@ -2251,7 +1981,7 @@
           <a:bodyPr wrap="square" rtlCol="0" anchor="ctr"/>
           <a:lstStyle/>
           <a:p>
-            <a:pPr indent="0" marL="0">
+            <a:pPr marL="0" indent="0">
               <a:lnSpc>
                 <a:spcPct val="110000"/>
               </a:lnSpc>
@@ -2271,7 +2001,7 @@
             <a:endParaRPr lang="en-US" sz="4200" dirty="0"/>
           </a:p>
           <a:p>
-            <a:pPr indent="0" marL="0">
+            <a:pPr marL="0" indent="0">
               <a:lnSpc>
                 <a:spcPct val="110000"/>
               </a:lnSpc>
@@ -2313,7 +2043,7 @@
           <a:bodyPr wrap="square" rtlCol="0" anchor="ctr"/>
           <a:lstStyle/>
           <a:p>
-            <a:pPr indent="0" marL="0">
+            <a:pPr marL="0" indent="0">
               <a:buNone/>
             </a:pPr>
             <a:r>
@@ -2352,7 +2082,7 @@
           <a:bodyPr wrap="square" rtlCol="0" anchor="ctr"/>
           <a:lstStyle/>
           <a:p>
-            <a:pPr indent="0" marL="0">
+            <a:pPr marL="0" indent="0">
               <a:buNone/>
             </a:pPr>
             <a:r>
@@ -2386,6 +2116,7 @@
         <a:solidFill>
           <a:srgbClr val="F8FAFC"/>
         </a:solidFill>
+        <a:effectLst/>
       </p:bgPr>
     </p:bg>
     <p:spTree>
@@ -2421,6 +2152,13 @@
           </a:solidFill>
           <a:ln/>
         </p:spPr>
+        <p:txBody>
+          <a:bodyPr/>
+          <a:lstStyle/>
+          <a:p>
+            <a:endParaRPr lang="en-US"/>
+          </a:p>
+        </p:txBody>
       </p:sp>
       <p:sp>
         <p:nvSpPr>
@@ -2443,7 +2181,7 @@
           <a:bodyPr wrap="square" rtlCol="0" anchor="ctr"/>
           <a:lstStyle/>
           <a:p>
-            <a:pPr algn="ctr" indent="0" marL="0">
+            <a:pPr marL="0" indent="0" algn="ctr">
               <a:buNone/>
             </a:pPr>
             <a:r>
@@ -2482,7 +2220,7 @@
           <a:bodyPr wrap="square" lIns="0" tIns="0" rIns="0" bIns="0" rtlCol="0" anchor="ctr"/>
           <a:lstStyle/>
           <a:p>
-            <a:pPr indent="0" marL="0">
+            <a:pPr marL="0" indent="0">
               <a:buNone/>
             </a:pPr>
             <a:r>
@@ -2519,13 +2257,20 @@
           </a:solidFill>
           <a:ln/>
           <a:effectLst>
-            <a:outerShdw sx="100000" sy="100000" kx="0" ky="0" algn="bl" rotWithShape="0" blurRad="76200" dist="25400" dir="8100000">
+            <a:outerShdw blurRad="76200" dist="25400" dir="8100000" algn="bl" rotWithShape="0">
               <a:srgbClr val="000000">
                 <a:alpha val="20000"/>
               </a:srgbClr>
             </a:outerShdw>
           </a:effectLst>
         </p:spPr>
+        <p:txBody>
+          <a:bodyPr/>
+          <a:lstStyle/>
+          <a:p>
+            <a:endParaRPr lang="en-US"/>
+          </a:p>
+        </p:txBody>
       </p:sp>
       <p:sp>
         <p:nvSpPr>
@@ -2546,6 +2291,13 @@
           </a:solidFill>
           <a:ln/>
         </p:spPr>
+        <p:txBody>
+          <a:bodyPr/>
+          <a:lstStyle/>
+          <a:p>
+            <a:endParaRPr lang="en-US"/>
+          </a:p>
+        </p:txBody>
       </p:sp>
       <p:sp>
         <p:nvSpPr>
@@ -2568,7 +2320,7 @@
           <a:bodyPr wrap="square" lIns="0" tIns="0" rIns="0" bIns="0" rtlCol="0" anchor="ctr"/>
           <a:lstStyle/>
           <a:p>
-            <a:pPr indent="0" marL="0">
+            <a:pPr marL="0" indent="0">
               <a:buNone/>
             </a:pPr>
             <a:r>
@@ -2690,13 +2442,20 @@
           </a:solidFill>
           <a:ln/>
           <a:effectLst>
-            <a:outerShdw sx="100000" sy="100000" kx="0" ky="0" algn="bl" rotWithShape="0" blurRad="76200" dist="25400" dir="8100000">
+            <a:outerShdw blurRad="76200" dist="25400" dir="8100000" algn="bl" rotWithShape="0">
               <a:srgbClr val="000000">
                 <a:alpha val="20000"/>
               </a:srgbClr>
             </a:outerShdw>
           </a:effectLst>
         </p:spPr>
+        <p:txBody>
+          <a:bodyPr/>
+          <a:lstStyle/>
+          <a:p>
+            <a:endParaRPr lang="en-US"/>
+          </a:p>
+        </p:txBody>
       </p:sp>
       <p:sp>
         <p:nvSpPr>
@@ -2717,6 +2476,13 @@
           </a:solidFill>
           <a:ln/>
         </p:spPr>
+        <p:txBody>
+          <a:bodyPr/>
+          <a:lstStyle/>
+          <a:p>
+            <a:endParaRPr lang="en-US"/>
+          </a:p>
+        </p:txBody>
       </p:sp>
       <p:sp>
         <p:nvSpPr>
@@ -2739,7 +2505,7 @@
           <a:bodyPr wrap="square" lIns="0" tIns="0" rIns="0" bIns="0" rtlCol="0" anchor="ctr"/>
           <a:lstStyle/>
           <a:p>
-            <a:pPr indent="0" marL="0">
+            <a:pPr marL="0" indent="0">
               <a:buNone/>
             </a:pPr>
             <a:r>
@@ -2861,6 +2627,13 @@
           </a:solidFill>
           <a:ln/>
         </p:spPr>
+        <p:txBody>
+          <a:bodyPr/>
+          <a:lstStyle/>
+          <a:p>
+            <a:endParaRPr lang="en-US"/>
+          </a:p>
+        </p:txBody>
       </p:sp>
       <p:sp>
         <p:nvSpPr>
@@ -2883,7 +2656,7 @@
           <a:bodyPr wrap="square" rtlCol="0" anchor="ctr"/>
           <a:lstStyle/>
           <a:p>
-            <a:pPr indent="0" marL="0">
+            <a:pPr marL="0" indent="0">
               <a:buNone/>
             </a:pPr>
             <a:r>
@@ -3007,7 +2780,7 @@
           <a:bodyPr wrap="square" rtlCol="0" anchor="ctr"/>
           <a:lstStyle/>
           <a:p>
-            <a:pPr algn="r" indent="0" marL="0">
+            <a:pPr marL="0" indent="0" algn="r">
               <a:buNone/>
             </a:pPr>
             <a:r>
@@ -3041,6 +2814,7 @@
         <a:solidFill>
           <a:srgbClr val="F8FAFC"/>
         </a:solidFill>
+        <a:effectLst/>
       </p:bgPr>
     </p:bg>
     <p:spTree>
@@ -3078,7 +2852,7 @@
           <a:bodyPr wrap="square" lIns="0" tIns="0" rIns="0" bIns="0" rtlCol="0" anchor="ctr"/>
           <a:lstStyle/>
           <a:p>
-            <a:pPr indent="0" marL="0">
+            <a:pPr marL="0" indent="0">
               <a:buNone/>
             </a:pPr>
             <a:r>
@@ -3115,13 +2889,20 @@
           </a:solidFill>
           <a:ln/>
           <a:effectLst>
-            <a:outerShdw sx="100000" sy="100000" kx="0" ky="0" algn="bl" rotWithShape="0" blurRad="76200" dist="25400" dir="8100000">
+            <a:outerShdw blurRad="76200" dist="25400" dir="8100000" algn="bl" rotWithShape="0">
               <a:srgbClr val="000000">
                 <a:alpha val="20000"/>
               </a:srgbClr>
             </a:outerShdw>
           </a:effectLst>
         </p:spPr>
+        <p:txBody>
+          <a:bodyPr/>
+          <a:lstStyle/>
+          <a:p>
+            <a:endParaRPr lang="en-US"/>
+          </a:p>
+        </p:txBody>
       </p:sp>
       <p:sp>
         <p:nvSpPr>
@@ -3142,6 +2923,13 @@
           </a:solidFill>
           <a:ln/>
         </p:spPr>
+        <p:txBody>
+          <a:bodyPr/>
+          <a:lstStyle/>
+          <a:p>
+            <a:endParaRPr lang="en-US"/>
+          </a:p>
+        </p:txBody>
       </p:sp>
       <p:sp>
         <p:nvSpPr>
@@ -3164,7 +2952,7 @@
           <a:bodyPr wrap="square" lIns="0" tIns="0" rIns="0" bIns="0" rtlCol="0" anchor="ctr"/>
           <a:lstStyle/>
           <a:p>
-            <a:pPr indent="0" marL="0">
+            <a:pPr marL="0" indent="0">
               <a:buNone/>
             </a:pPr>
             <a:r>
@@ -3203,7 +2991,7 @@
           <a:bodyPr wrap="square" lIns="0" tIns="0" rIns="0" bIns="0" rtlCol="0" anchor="ctr"/>
           <a:lstStyle/>
           <a:p>
-            <a:pPr indent="0" marL="0">
+            <a:pPr marL="0" indent="0">
               <a:buNone/>
             </a:pPr>
             <a:r>
@@ -3367,13 +3155,20 @@
           </a:solidFill>
           <a:ln/>
           <a:effectLst>
-            <a:outerShdw sx="100000" sy="100000" kx="0" ky="0" algn="bl" rotWithShape="0" blurRad="76200" dist="25400" dir="8100000">
+            <a:outerShdw blurRad="76200" dist="25400" dir="8100000" algn="bl" rotWithShape="0">
               <a:srgbClr val="000000">
                 <a:alpha val="20000"/>
               </a:srgbClr>
             </a:outerShdw>
           </a:effectLst>
         </p:spPr>
+        <p:txBody>
+          <a:bodyPr/>
+          <a:lstStyle/>
+          <a:p>
+            <a:endParaRPr lang="en-US"/>
+          </a:p>
+        </p:txBody>
       </p:sp>
       <p:sp>
         <p:nvSpPr>
@@ -3394,6 +3189,13 @@
           </a:solidFill>
           <a:ln/>
         </p:spPr>
+        <p:txBody>
+          <a:bodyPr/>
+          <a:lstStyle/>
+          <a:p>
+            <a:endParaRPr lang="en-US"/>
+          </a:p>
+        </p:txBody>
       </p:sp>
       <p:sp>
         <p:nvSpPr>
@@ -3416,7 +3218,7 @@
           <a:bodyPr wrap="square" lIns="0" tIns="0" rIns="0" bIns="0" rtlCol="0" anchor="ctr"/>
           <a:lstStyle/>
           <a:p>
-            <a:pPr indent="0" marL="0">
+            <a:pPr marL="0" indent="0">
               <a:buNone/>
             </a:pPr>
             <a:r>
@@ -3455,7 +3257,7 @@
           <a:bodyPr wrap="square" lIns="0" tIns="0" rIns="0" bIns="0" rtlCol="0" anchor="ctr"/>
           <a:lstStyle/>
           <a:p>
-            <a:pPr indent="0" marL="0">
+            <a:pPr marL="0" indent="0">
               <a:buNone/>
             </a:pPr>
             <a:r>
@@ -3619,13 +3421,20 @@
           </a:solidFill>
           <a:ln/>
           <a:effectLst>
-            <a:outerShdw sx="100000" sy="100000" kx="0" ky="0" algn="bl" rotWithShape="0" blurRad="76200" dist="25400" dir="8100000">
+            <a:outerShdw blurRad="76200" dist="25400" dir="8100000" algn="bl" rotWithShape="0">
               <a:srgbClr val="000000">
                 <a:alpha val="20000"/>
               </a:srgbClr>
             </a:outerShdw>
           </a:effectLst>
         </p:spPr>
+        <p:txBody>
+          <a:bodyPr/>
+          <a:lstStyle/>
+          <a:p>
+            <a:endParaRPr lang="en-US"/>
+          </a:p>
+        </p:txBody>
       </p:sp>
       <p:sp>
         <p:nvSpPr>
@@ -3646,6 +3455,13 @@
           </a:solidFill>
           <a:ln/>
         </p:spPr>
+        <p:txBody>
+          <a:bodyPr/>
+          <a:lstStyle/>
+          <a:p>
+            <a:endParaRPr lang="en-US"/>
+          </a:p>
+        </p:txBody>
       </p:sp>
       <p:sp>
         <p:nvSpPr>
@@ -3668,7 +3484,7 @@
           <a:bodyPr wrap="square" lIns="0" tIns="0" rIns="0" bIns="0" rtlCol="0" anchor="ctr"/>
           <a:lstStyle/>
           <a:p>
-            <a:pPr indent="0" marL="0">
+            <a:pPr marL="0" indent="0">
               <a:buNone/>
             </a:pPr>
             <a:r>
@@ -3707,7 +3523,7 @@
           <a:bodyPr wrap="square" lIns="0" tIns="0" rIns="0" bIns="0" rtlCol="0" anchor="ctr"/>
           <a:lstStyle/>
           <a:p>
-            <a:pPr indent="0" marL="0">
+            <a:pPr marL="0" indent="0">
               <a:buNone/>
             </a:pPr>
             <a:r>
@@ -3767,7 +3583,7 @@
             <a:endParaRPr lang="en-US" sz="1050" dirty="0"/>
           </a:p>
           <a:p>
-            <a:pPr lvl="1" indent="0" marL="0">
+            <a:pPr marL="0" lvl="1" indent="0">
               <a:spcAft>
                 <a:spcPts val="400"/>
               </a:spcAft>
@@ -3808,7 +3624,7 @@
             <a:endParaRPr lang="en-US" sz="1050" dirty="0"/>
           </a:p>
           <a:p>
-            <a:pPr lvl="1" indent="0" marL="0">
+            <a:pPr marL="0" lvl="1" indent="0">
               <a:spcAft>
                 <a:spcPts val="400"/>
               </a:spcAft>
@@ -3871,7 +3687,7 @@
           <a:bodyPr wrap="square" rtlCol="0" anchor="ctr"/>
           <a:lstStyle/>
           <a:p>
-            <a:pPr indent="0" marL="0">
+            <a:pPr marL="0" indent="0">
               <a:buNone/>
             </a:pPr>
             <a:r>
@@ -3910,7 +3726,7 @@
           <a:bodyPr wrap="square" rtlCol="0" anchor="ctr"/>
           <a:lstStyle/>
           <a:p>
-            <a:pPr algn="r" indent="0" marL="0">
+            <a:pPr marL="0" indent="0" algn="r">
               <a:buNone/>
             </a:pPr>
             <a:r>
@@ -3944,6 +3760,7 @@
         <a:solidFill>
           <a:srgbClr val="F8FAFC"/>
         </a:solidFill>
+        <a:effectLst/>
       </p:bgPr>
     </p:bg>
     <p:spTree>
@@ -3981,7 +3798,7 @@
           <a:bodyPr wrap="square" lIns="0" tIns="0" rIns="0" bIns="0" rtlCol="0" anchor="ctr"/>
           <a:lstStyle/>
           <a:p>
-            <a:pPr indent="0" marL="0">
+            <a:pPr marL="0" indent="0">
               <a:buNone/>
             </a:pPr>
             <a:r>
@@ -4018,13 +3835,20 @@
           </a:solidFill>
           <a:ln/>
           <a:effectLst>
-            <a:outerShdw sx="100000" sy="100000" kx="0" ky="0" algn="bl" rotWithShape="0" blurRad="76200" dist="25400" dir="8100000">
+            <a:outerShdw blurRad="76200" dist="25400" dir="8100000" algn="bl" rotWithShape="0">
               <a:srgbClr val="000000">
                 <a:alpha val="20000"/>
               </a:srgbClr>
             </a:outerShdw>
           </a:effectLst>
         </p:spPr>
+        <p:txBody>
+          <a:bodyPr/>
+          <a:lstStyle/>
+          <a:p>
+            <a:endParaRPr lang="en-US"/>
+          </a:p>
+        </p:txBody>
       </p:sp>
       <p:sp>
         <p:nvSpPr>
@@ -4045,6 +3869,13 @@
           </a:solidFill>
           <a:ln/>
         </p:spPr>
+        <p:txBody>
+          <a:bodyPr/>
+          <a:lstStyle/>
+          <a:p>
+            <a:endParaRPr lang="en-US"/>
+          </a:p>
+        </p:txBody>
       </p:sp>
       <p:sp>
         <p:nvSpPr>
@@ -4067,7 +3898,7 @@
           <a:bodyPr wrap="square" lIns="0" tIns="0" rIns="0" bIns="0" rtlCol="0" anchor="ctr"/>
           <a:lstStyle/>
           <a:p>
-            <a:pPr indent="0" marL="0">
+            <a:pPr marL="0" indent="0">
               <a:buNone/>
             </a:pPr>
             <a:r>
@@ -4104,6 +3935,13 @@
           </a:solidFill>
           <a:ln/>
         </p:spPr>
+        <p:txBody>
+          <a:bodyPr/>
+          <a:lstStyle/>
+          <a:p>
+            <a:endParaRPr lang="en-US"/>
+          </a:p>
+        </p:txBody>
       </p:sp>
       <p:sp>
         <p:nvSpPr>
@@ -4126,7 +3964,7 @@
           <a:bodyPr wrap="square" rtlCol="0" anchor="ctr"/>
           <a:lstStyle/>
           <a:p>
-            <a:pPr algn="ctr" indent="0" marL="0">
+            <a:pPr marL="0" indent="0" algn="ctr">
               <a:buNone/>
             </a:pPr>
             <a:r>
@@ -4287,13 +4125,20 @@
           </a:solidFill>
           <a:ln/>
           <a:effectLst>
-            <a:outerShdw sx="100000" sy="100000" kx="0" ky="0" algn="bl" rotWithShape="0" blurRad="76200" dist="25400" dir="8100000">
+            <a:outerShdw blurRad="76200" dist="25400" dir="8100000" algn="bl" rotWithShape="0">
               <a:srgbClr val="000000">
                 <a:alpha val="20000"/>
               </a:srgbClr>
             </a:outerShdw>
           </a:effectLst>
         </p:spPr>
+        <p:txBody>
+          <a:bodyPr/>
+          <a:lstStyle/>
+          <a:p>
+            <a:endParaRPr lang="en-US"/>
+          </a:p>
+        </p:txBody>
       </p:sp>
       <p:sp>
         <p:nvSpPr>
@@ -4314,6 +4159,13 @@
           </a:solidFill>
           <a:ln/>
         </p:spPr>
+        <p:txBody>
+          <a:bodyPr/>
+          <a:lstStyle/>
+          <a:p>
+            <a:endParaRPr lang="en-US"/>
+          </a:p>
+        </p:txBody>
       </p:sp>
       <p:sp>
         <p:nvSpPr>
@@ -4336,7 +4188,7 @@
           <a:bodyPr wrap="square" lIns="0" tIns="0" rIns="0" bIns="0" rtlCol="0" anchor="ctr"/>
           <a:lstStyle/>
           <a:p>
-            <a:pPr indent="0" marL="0">
+            <a:pPr marL="0" indent="0">
               <a:buNone/>
             </a:pPr>
             <a:r>
@@ -4373,6 +4225,13 @@
           </a:solidFill>
           <a:ln/>
         </p:spPr>
+        <p:txBody>
+          <a:bodyPr/>
+          <a:lstStyle/>
+          <a:p>
+            <a:endParaRPr lang="en-US"/>
+          </a:p>
+        </p:txBody>
       </p:sp>
       <p:sp>
         <p:nvSpPr>
@@ -4395,7 +4254,7 @@
           <a:bodyPr wrap="square" rtlCol="0" anchor="ctr"/>
           <a:lstStyle/>
           <a:p>
-            <a:pPr algn="ctr" indent="0" marL="0">
+            <a:pPr marL="0" indent="0" algn="ctr">
               <a:buNone/>
             </a:pPr>
             <a:r>
@@ -4556,6 +4415,13 @@
           </a:solidFill>
           <a:ln/>
         </p:spPr>
+        <p:txBody>
+          <a:bodyPr/>
+          <a:lstStyle/>
+          <a:p>
+            <a:endParaRPr lang="en-US"/>
+          </a:p>
+        </p:txBody>
       </p:sp>
       <p:sp>
         <p:nvSpPr>
@@ -4578,7 +4444,7 @@
           <a:bodyPr wrap="square" rtlCol="0" anchor="ctr"/>
           <a:lstStyle/>
           <a:p>
-            <a:pPr indent="0" marL="0">
+            <a:pPr marL="0" indent="0">
               <a:buNone/>
             </a:pPr>
             <a:r>
@@ -4617,7 +4483,7 @@
           <a:bodyPr wrap="square" rtlCol="0" anchor="ctr"/>
           <a:lstStyle/>
           <a:p>
-            <a:pPr algn="r" indent="0" marL="0">
+            <a:pPr marL="0" indent="0" algn="r">
               <a:buNone/>
             </a:pPr>
             <a:r>
@@ -4651,6 +4517,7 @@
         <a:solidFill>
           <a:srgbClr val="0A1420"/>
         </a:solidFill>
+        <a:effectLst/>
       </p:bgPr>
     </p:bg>
     <p:spTree>
@@ -4688,7 +4555,7 @@
           <a:bodyPr wrap="square" lIns="0" tIns="0" rIns="0" bIns="0" rtlCol="0" anchor="ctr"/>
           <a:lstStyle/>
           <a:p>
-            <a:pPr indent="0" marL="0">
+            <a:pPr marL="0" indent="0">
               <a:buNone/>
             </a:pPr>
             <a:r>
@@ -4725,6 +4592,13 @@
           </a:solidFill>
           <a:ln/>
         </p:spPr>
+        <p:txBody>
+          <a:bodyPr/>
+          <a:lstStyle/>
+          <a:p>
+            <a:endParaRPr lang="en-US"/>
+          </a:p>
+        </p:txBody>
       </p:sp>
       <p:sp>
         <p:nvSpPr>
@@ -4745,6 +4619,13 @@
           </a:solidFill>
           <a:ln/>
         </p:spPr>
+        <p:txBody>
+          <a:bodyPr/>
+          <a:lstStyle/>
+          <a:p>
+            <a:endParaRPr lang="en-US"/>
+          </a:p>
+        </p:txBody>
       </p:sp>
       <p:sp>
         <p:nvSpPr>
@@ -4765,6 +4646,13 @@
           </a:solidFill>
           <a:ln/>
         </p:spPr>
+        <p:txBody>
+          <a:bodyPr/>
+          <a:lstStyle/>
+          <a:p>
+            <a:endParaRPr lang="en-US"/>
+          </a:p>
+        </p:txBody>
       </p:sp>
       <p:sp>
         <p:nvSpPr>
@@ -4787,7 +4675,7 @@
           <a:bodyPr wrap="square" rtlCol="0" anchor="ctr"/>
           <a:lstStyle/>
           <a:p>
-            <a:pPr algn="ctr" indent="0" marL="0">
+            <a:pPr marL="0" indent="0" algn="ctr">
               <a:buNone/>
             </a:pPr>
             <a:r>
@@ -4826,7 +4714,7 @@
           <a:bodyPr wrap="square" lIns="0" tIns="0" rIns="0" bIns="0" rtlCol="0" anchor="ctr"/>
           <a:lstStyle/>
           <a:p>
-            <a:pPr indent="0" marL="0">
+            <a:pPr marL="0" indent="0">
               <a:buNone/>
             </a:pPr>
             <a:r>
@@ -4865,7 +4753,7 @@
           <a:bodyPr wrap="square" lIns="0" tIns="0" rIns="0" bIns="0" rtlCol="0" anchor="ctr"/>
           <a:lstStyle/>
           <a:p>
-            <a:pPr indent="0" marL="0">
+            <a:pPr marL="0" indent="0">
               <a:buNone/>
             </a:pPr>
             <a:r>
@@ -4902,6 +4790,13 @@
           </a:solidFill>
           <a:ln/>
         </p:spPr>
+        <p:txBody>
+          <a:bodyPr/>
+          <a:lstStyle/>
+          <a:p>
+            <a:endParaRPr lang="en-US"/>
+          </a:p>
+        </p:txBody>
       </p:sp>
       <p:sp>
         <p:nvSpPr>
@@ -4922,6 +4817,13 @@
           </a:solidFill>
           <a:ln/>
         </p:spPr>
+        <p:txBody>
+          <a:bodyPr/>
+          <a:lstStyle/>
+          <a:p>
+            <a:endParaRPr lang="en-US"/>
+          </a:p>
+        </p:txBody>
       </p:sp>
       <p:sp>
         <p:nvSpPr>
@@ -4942,6 +4844,13 @@
           </a:solidFill>
           <a:ln/>
         </p:spPr>
+        <p:txBody>
+          <a:bodyPr/>
+          <a:lstStyle/>
+          <a:p>
+            <a:endParaRPr lang="en-US"/>
+          </a:p>
+        </p:txBody>
       </p:sp>
       <p:sp>
         <p:nvSpPr>
@@ -4964,7 +4873,7 @@
           <a:bodyPr wrap="square" rtlCol="0" anchor="ctr"/>
           <a:lstStyle/>
           <a:p>
-            <a:pPr algn="ctr" indent="0" marL="0">
+            <a:pPr marL="0" indent="0" algn="ctr">
               <a:buNone/>
             </a:pPr>
             <a:r>
@@ -5003,7 +4912,7 @@
           <a:bodyPr wrap="square" lIns="0" tIns="0" rIns="0" bIns="0" rtlCol="0" anchor="ctr"/>
           <a:lstStyle/>
           <a:p>
-            <a:pPr indent="0" marL="0">
+            <a:pPr marL="0" indent="0">
               <a:buNone/>
             </a:pPr>
             <a:r>
@@ -5042,7 +4951,7 @@
           <a:bodyPr wrap="square" lIns="0" tIns="0" rIns="0" bIns="0" rtlCol="0" anchor="ctr"/>
           <a:lstStyle/>
           <a:p>
-            <a:pPr indent="0" marL="0">
+            <a:pPr marL="0" indent="0">
               <a:buNone/>
             </a:pPr>
             <a:r>
@@ -5079,6 +4988,13 @@
           </a:solidFill>
           <a:ln/>
         </p:spPr>
+        <p:txBody>
+          <a:bodyPr/>
+          <a:lstStyle/>
+          <a:p>
+            <a:endParaRPr lang="en-US"/>
+          </a:p>
+        </p:txBody>
       </p:sp>
       <p:sp>
         <p:nvSpPr>
@@ -5099,6 +5015,13 @@
           </a:solidFill>
           <a:ln/>
         </p:spPr>
+        <p:txBody>
+          <a:bodyPr/>
+          <a:lstStyle/>
+          <a:p>
+            <a:endParaRPr lang="en-US"/>
+          </a:p>
+        </p:txBody>
       </p:sp>
       <p:sp>
         <p:nvSpPr>
@@ -5119,6 +5042,13 @@
           </a:solidFill>
           <a:ln/>
         </p:spPr>
+        <p:txBody>
+          <a:bodyPr/>
+          <a:lstStyle/>
+          <a:p>
+            <a:endParaRPr lang="en-US"/>
+          </a:p>
+        </p:txBody>
       </p:sp>
       <p:sp>
         <p:nvSpPr>
@@ -5141,7 +5071,7 @@
           <a:bodyPr wrap="square" rtlCol="0" anchor="ctr"/>
           <a:lstStyle/>
           <a:p>
-            <a:pPr algn="ctr" indent="0" marL="0">
+            <a:pPr marL="0" indent="0" algn="ctr">
               <a:buNone/>
             </a:pPr>
             <a:r>
@@ -5180,7 +5110,7 @@
           <a:bodyPr wrap="square" lIns="0" tIns="0" rIns="0" bIns="0" rtlCol="0" anchor="ctr"/>
           <a:lstStyle/>
           <a:p>
-            <a:pPr indent="0" marL="0">
+            <a:pPr marL="0" indent="0">
               <a:buNone/>
             </a:pPr>
             <a:r>
@@ -5219,7 +5149,7 @@
           <a:bodyPr wrap="square" lIns="0" tIns="0" rIns="0" bIns="0" rtlCol="0" anchor="ctr"/>
           <a:lstStyle/>
           <a:p>
-            <a:pPr indent="0" marL="0">
+            <a:pPr marL="0" indent="0">
               <a:buNone/>
             </a:pPr>
             <a:r>
@@ -5256,6 +5186,13 @@
           </a:solidFill>
           <a:ln/>
         </p:spPr>
+        <p:txBody>
+          <a:bodyPr/>
+          <a:lstStyle/>
+          <a:p>
+            <a:endParaRPr lang="en-US"/>
+          </a:p>
+        </p:txBody>
       </p:sp>
       <p:sp>
         <p:nvSpPr>
@@ -5276,6 +5213,13 @@
           </a:solidFill>
           <a:ln/>
         </p:spPr>
+        <p:txBody>
+          <a:bodyPr/>
+          <a:lstStyle/>
+          <a:p>
+            <a:endParaRPr lang="en-US"/>
+          </a:p>
+        </p:txBody>
       </p:sp>
       <p:sp>
         <p:nvSpPr>
@@ -5296,6 +5240,13 @@
           </a:solidFill>
           <a:ln/>
         </p:spPr>
+        <p:txBody>
+          <a:bodyPr/>
+          <a:lstStyle/>
+          <a:p>
+            <a:endParaRPr lang="en-US"/>
+          </a:p>
+        </p:txBody>
       </p:sp>
       <p:sp>
         <p:nvSpPr>
@@ -5318,7 +5269,7 @@
           <a:bodyPr wrap="square" rtlCol="0" anchor="ctr"/>
           <a:lstStyle/>
           <a:p>
-            <a:pPr algn="ctr" indent="0" marL="0">
+            <a:pPr marL="0" indent="0" algn="ctr">
               <a:buNone/>
             </a:pPr>
             <a:r>
@@ -5357,7 +5308,7 @@
           <a:bodyPr wrap="square" lIns="0" tIns="0" rIns="0" bIns="0" rtlCol="0" anchor="ctr"/>
           <a:lstStyle/>
           <a:p>
-            <a:pPr indent="0" marL="0">
+            <a:pPr marL="0" indent="0">
               <a:buNone/>
             </a:pPr>
             <a:r>
@@ -5396,7 +5347,7 @@
           <a:bodyPr wrap="square" lIns="0" tIns="0" rIns="0" bIns="0" rtlCol="0" anchor="ctr"/>
           <a:lstStyle/>
           <a:p>
-            <a:pPr indent="0" marL="0">
+            <a:pPr marL="0" indent="0">
               <a:buNone/>
             </a:pPr>
             <a:r>
@@ -5433,6 +5384,13 @@
           </a:solidFill>
           <a:ln/>
         </p:spPr>
+        <p:txBody>
+          <a:bodyPr/>
+          <a:lstStyle/>
+          <a:p>
+            <a:endParaRPr lang="en-US"/>
+          </a:p>
+        </p:txBody>
       </p:sp>
       <p:sp>
         <p:nvSpPr>
@@ -5453,6 +5411,13 @@
           </a:solidFill>
           <a:ln/>
         </p:spPr>
+        <p:txBody>
+          <a:bodyPr/>
+          <a:lstStyle/>
+          <a:p>
+            <a:endParaRPr lang="en-US"/>
+          </a:p>
+        </p:txBody>
       </p:sp>
       <p:sp>
         <p:nvSpPr>
@@ -5473,6 +5438,13 @@
           </a:solidFill>
           <a:ln/>
         </p:spPr>
+        <p:txBody>
+          <a:bodyPr/>
+          <a:lstStyle/>
+          <a:p>
+            <a:endParaRPr lang="en-US"/>
+          </a:p>
+        </p:txBody>
       </p:sp>
       <p:sp>
         <p:nvSpPr>
@@ -5495,7 +5467,7 @@
           <a:bodyPr wrap="square" rtlCol="0" anchor="ctr"/>
           <a:lstStyle/>
           <a:p>
-            <a:pPr algn="ctr" indent="0" marL="0">
+            <a:pPr marL="0" indent="0" algn="ctr">
               <a:buNone/>
             </a:pPr>
             <a:r>
@@ -5534,7 +5506,7 @@
           <a:bodyPr wrap="square" lIns="0" tIns="0" rIns="0" bIns="0" rtlCol="0" anchor="ctr"/>
           <a:lstStyle/>
           <a:p>
-            <a:pPr indent="0" marL="0">
+            <a:pPr marL="0" indent="0">
               <a:buNone/>
             </a:pPr>
             <a:r>
@@ -5573,7 +5545,7 @@
           <a:bodyPr wrap="square" lIns="0" tIns="0" rIns="0" bIns="0" rtlCol="0" anchor="ctr"/>
           <a:lstStyle/>
           <a:p>
-            <a:pPr indent="0" marL="0">
+            <a:pPr marL="0" indent="0">
               <a:buNone/>
             </a:pPr>
             <a:r>
@@ -5610,6 +5582,13 @@
           </a:solidFill>
           <a:ln/>
         </p:spPr>
+        <p:txBody>
+          <a:bodyPr/>
+          <a:lstStyle/>
+          <a:p>
+            <a:endParaRPr lang="en-US"/>
+          </a:p>
+        </p:txBody>
       </p:sp>
       <p:sp>
         <p:nvSpPr>
@@ -5630,6 +5609,13 @@
           </a:solidFill>
           <a:ln/>
         </p:spPr>
+        <p:txBody>
+          <a:bodyPr/>
+          <a:lstStyle/>
+          <a:p>
+            <a:endParaRPr lang="en-US"/>
+          </a:p>
+        </p:txBody>
       </p:sp>
       <p:sp>
         <p:nvSpPr>
@@ -5650,6 +5636,13 @@
           </a:solidFill>
           <a:ln/>
         </p:spPr>
+        <p:txBody>
+          <a:bodyPr/>
+          <a:lstStyle/>
+          <a:p>
+            <a:endParaRPr lang="en-US"/>
+          </a:p>
+        </p:txBody>
       </p:sp>
       <p:sp>
         <p:nvSpPr>
@@ -5672,7 +5665,7 @@
           <a:bodyPr wrap="square" rtlCol="0" anchor="ctr"/>
           <a:lstStyle/>
           <a:p>
-            <a:pPr algn="ctr" indent="0" marL="0">
+            <a:pPr marL="0" indent="0" algn="ctr">
               <a:buNone/>
             </a:pPr>
             <a:r>
@@ -5711,7 +5704,7 @@
           <a:bodyPr wrap="square" lIns="0" tIns="0" rIns="0" bIns="0" rtlCol="0" anchor="ctr"/>
           <a:lstStyle/>
           <a:p>
-            <a:pPr indent="0" marL="0">
+            <a:pPr marL="0" indent="0">
               <a:buNone/>
             </a:pPr>
             <a:r>
@@ -5750,7 +5743,7 @@
           <a:bodyPr wrap="square" lIns="0" tIns="0" rIns="0" bIns="0" rtlCol="0" anchor="ctr"/>
           <a:lstStyle/>
           <a:p>
-            <a:pPr indent="0" marL="0">
+            <a:pPr marL="0" indent="0">
               <a:buNone/>
             </a:pPr>
             <a:r>
@@ -5789,7 +5782,7 @@
           <a:bodyPr wrap="square" rtlCol="0" anchor="ctr"/>
           <a:lstStyle/>
           <a:p>
-            <a:pPr algn="r" indent="0" marL="0">
+            <a:pPr marL="0" indent="0" algn="r">
               <a:buNone/>
             </a:pPr>
             <a:r>
@@ -5823,6 +5816,7 @@
         <a:solidFill>
           <a:srgbClr val="F8FAFC"/>
         </a:solidFill>
+        <a:effectLst/>
       </p:bgPr>
     </p:bg>
     <p:spTree>
@@ -5860,7 +5854,7 @@
           <a:bodyPr wrap="square" lIns="0" tIns="0" rIns="0" bIns="0" rtlCol="0" anchor="ctr"/>
           <a:lstStyle/>
           <a:p>
-            <a:pPr indent="0" marL="0">
+            <a:pPr marL="0" indent="0">
               <a:buNone/>
             </a:pPr>
             <a:r>
@@ -5897,6 +5891,13 @@
           </a:solidFill>
           <a:ln/>
         </p:spPr>
+        <p:txBody>
+          <a:bodyPr/>
+          <a:lstStyle/>
+          <a:p>
+            <a:endParaRPr lang="en-US"/>
+          </a:p>
+        </p:txBody>
       </p:sp>
       <p:sp>
         <p:nvSpPr>
@@ -5919,7 +5920,7 @@
           <a:bodyPr wrap="square" rtlCol="0" anchor="ctr"/>
           <a:lstStyle/>
           <a:p>
-            <a:pPr algn="ctr" indent="0" marL="0">
+            <a:pPr marL="0" indent="0" algn="ctr">
               <a:buNone/>
             </a:pPr>
             <a:r>
@@ -5956,6 +5957,13 @@
           </a:solidFill>
           <a:ln/>
         </p:spPr>
+        <p:txBody>
+          <a:bodyPr/>
+          <a:lstStyle/>
+          <a:p>
+            <a:endParaRPr lang="en-US"/>
+          </a:p>
+        </p:txBody>
       </p:sp>
       <p:sp>
         <p:nvSpPr>
@@ -5978,7 +5986,7 @@
           <a:bodyPr wrap="square" rtlCol="0" anchor="ctr"/>
           <a:lstStyle/>
           <a:p>
-            <a:pPr algn="ctr" indent="0" marL="0">
+            <a:pPr marL="0" indent="0" algn="ctr">
               <a:buNone/>
             </a:pPr>
             <a:r>
@@ -6015,6 +6023,13 @@
           </a:solidFill>
           <a:ln/>
         </p:spPr>
+        <p:txBody>
+          <a:bodyPr/>
+          <a:lstStyle/>
+          <a:p>
+            <a:endParaRPr lang="en-US"/>
+          </a:p>
+        </p:txBody>
       </p:sp>
       <p:sp>
         <p:nvSpPr>
@@ -6037,7 +6052,7 @@
           <a:bodyPr wrap="square" rtlCol="0" anchor="ctr"/>
           <a:lstStyle/>
           <a:p>
-            <a:pPr algn="ctr" indent="0" marL="0">
+            <a:pPr marL="0" indent="0" algn="ctr">
               <a:buNone/>
             </a:pPr>
             <a:r>
@@ -6074,6 +6089,13 @@
           </a:solidFill>
           <a:ln/>
         </p:spPr>
+        <p:txBody>
+          <a:bodyPr/>
+          <a:lstStyle/>
+          <a:p>
+            <a:endParaRPr lang="en-US"/>
+          </a:p>
+        </p:txBody>
       </p:sp>
       <p:sp>
         <p:nvSpPr>
@@ -6096,7 +6118,7 @@
           <a:bodyPr wrap="square" rtlCol="0" anchor="ctr"/>
           <a:lstStyle/>
           <a:p>
-            <a:pPr algn="ctr" indent="0" marL="0">
+            <a:pPr marL="0" indent="0" algn="ctr">
               <a:buNone/>
             </a:pPr>
             <a:r>
@@ -6133,6 +6155,13 @@
           </a:solidFill>
           <a:ln/>
         </p:spPr>
+        <p:txBody>
+          <a:bodyPr/>
+          <a:lstStyle/>
+          <a:p>
+            <a:endParaRPr lang="en-US"/>
+          </a:p>
+        </p:txBody>
       </p:sp>
       <p:sp>
         <p:nvSpPr>
@@ -6155,7 +6184,7 @@
           <a:bodyPr wrap="square" rtlCol="0" anchor="ctr"/>
           <a:lstStyle/>
           <a:p>
-            <a:pPr algn="ctr" indent="0" marL="0">
+            <a:pPr marL="0" indent="0" algn="ctr">
               <a:buNone/>
             </a:pPr>
             <a:r>
@@ -6192,6 +6221,13 @@
           </a:solidFill>
           <a:ln/>
         </p:spPr>
+        <p:txBody>
+          <a:bodyPr/>
+          <a:lstStyle/>
+          <a:p>
+            <a:endParaRPr lang="en-US"/>
+          </a:p>
+        </p:txBody>
       </p:sp>
       <p:sp>
         <p:nvSpPr>
@@ -6214,7 +6250,7 @@
           <a:bodyPr wrap="square" rtlCol="0" anchor="ctr"/>
           <a:lstStyle/>
           <a:p>
-            <a:pPr algn="ctr" indent="0" marL="0">
+            <a:pPr marL="0" indent="0" algn="ctr">
               <a:buNone/>
             </a:pPr>
             <a:r>
@@ -6254,6 +6290,13 @@
             <a:prstDash val="solid"/>
           </a:ln>
         </p:spPr>
+        <p:txBody>
+          <a:bodyPr/>
+          <a:lstStyle/>
+          <a:p>
+            <a:endParaRPr lang="en-US"/>
+          </a:p>
+        </p:txBody>
       </p:sp>
       <p:sp>
         <p:nvSpPr>
@@ -6264,7 +6307,7 @@
         <p:spPr>
           <a:xfrm>
             <a:off x="1691640" y="2121408"/>
-            <a:ext cx="868680" cy="-384048"/>
+            <a:ext cx="868680" cy="0"/>
           </a:xfrm>
           <a:prstGeom prst="line">
             <a:avLst/>
@@ -6277,6 +6320,13 @@
             <a:prstDash val="solid"/>
           </a:ln>
         </p:spPr>
+        <p:txBody>
+          <a:bodyPr/>
+          <a:lstStyle/>
+          <a:p>
+            <a:endParaRPr lang="en-US"/>
+          </a:p>
+        </p:txBody>
       </p:sp>
       <p:sp>
         <p:nvSpPr>
@@ -6299,7 +6349,7 @@
           <a:bodyPr wrap="square" rtlCol="0" anchor="ctr"/>
           <a:lstStyle/>
           <a:p>
-            <a:pPr algn="ctr" indent="0" marL="0">
+            <a:pPr marL="0" indent="0" algn="ctr">
               <a:buNone/>
             </a:pPr>
             <a:r>
@@ -6338,7 +6388,7 @@
           <a:bodyPr wrap="square" rtlCol="0" anchor="ctr"/>
           <a:lstStyle/>
           <a:p>
-            <a:pPr algn="ctr" indent="0" marL="0">
+            <a:pPr marL="0" indent="0" algn="ctr">
               <a:buNone/>
             </a:pPr>
             <a:r>
@@ -6377,7 +6427,7 @@
           <a:bodyPr wrap="square" rtlCol="0" anchor="ctr"/>
           <a:lstStyle/>
           <a:p>
-            <a:pPr algn="ctr" indent="0" marL="0">
+            <a:pPr marL="0" indent="0" algn="ctr">
               <a:buNone/>
             </a:pPr>
             <a:r>
@@ -6416,7 +6466,7 @@
           <a:bodyPr wrap="square" rtlCol="0" anchor="ctr"/>
           <a:lstStyle/>
           <a:p>
-            <a:pPr indent="0" marL="0">
+            <a:pPr marL="0" indent="0">
               <a:buNone/>
             </a:pPr>
             <a:r>
@@ -6436,7 +6486,7 @@
       </p:sp>
       <p:graphicFrame>
         <p:nvGraphicFramePr>
-          <p:cNvPr id="15" name="Table 0"/>
+          <p:cNvPr id="21" name="Table 0"/>
           <p:cNvGraphicFramePr>
             <a:graphicFrameLocks noGrp="1"/>
           </p:cNvGraphicFramePr>
@@ -6450,16 +6500,34 @@
         </p:nvGraphicFramePr>
         <p:xfrm>
           <a:off x="548640" y="2606040"/>
-          <a:ext cx="8046720" cy="914400"/>
+          <a:ext cx="8046720" cy="1600200"/>
         </p:xfrm>
         <a:graphic>
           <a:graphicData uri="http://schemas.openxmlformats.org/drawingml/2006/table">
             <a:tbl>
               <a:tblPr/>
               <a:tblGrid>
-                <a:gridCol w="1645920"/>
-                <a:gridCol w="1371600"/>
-                <a:gridCol w="5029200"/>
+                <a:gridCol w="1645920">
+                  <a:extLst>
+                    <a:ext uri="{9D8B030D-6E8A-4147-A177-3AD203B41FA5}">
+                      <a16:colId xmlns:a16="http://schemas.microsoft.com/office/drawing/2014/main" val="20000"/>
+                    </a:ext>
+                  </a:extLst>
+                </a:gridCol>
+                <a:gridCol w="1371600">
+                  <a:extLst>
+                    <a:ext uri="{9D8B030D-6E8A-4147-A177-3AD203B41FA5}">
+                      <a16:colId xmlns:a16="http://schemas.microsoft.com/office/drawing/2014/main" val="20001"/>
+                    </a:ext>
+                  </a:extLst>
+                </a:gridCol>
+                <a:gridCol w="5029200">
+                  <a:extLst>
+                    <a:ext uri="{9D8B030D-6E8A-4147-A177-3AD203B41FA5}">
+                      <a16:colId xmlns:a16="http://schemas.microsoft.com/office/drawing/2014/main" val="20002"/>
+                    </a:ext>
+                  </a:extLst>
+                </a:gridCol>
               </a:tblGrid>
               <a:tr h="320040">
                 <a:tc>
@@ -6467,7 +6535,7 @@
                     <a:bodyPr/>
                     <a:lstStyle/>
                     <a:p>
-                      <a:pPr algn="ctr" indent="0" marL="0">
+                      <a:pPr marL="0" indent="0" algn="ctr">
                         <a:buNone/>
                       </a:pPr>
                       <a:r>
@@ -6488,7 +6556,7 @@
                       </a:endParaRPr>
                     </a:p>
                   </a:txBody>
-                  <a:tcPr marL="91440" marR="91440" marT="45720" marB="45720">
+                  <a:tcPr>
                     <a:lnL w="6350" cap="flat" cmpd="sng" algn="ctr">
                       <a:solidFill>
                         <a:srgbClr val="CBD5E1"/>
@@ -6535,7 +6603,7 @@
                     <a:bodyPr/>
                     <a:lstStyle/>
                     <a:p>
-                      <a:pPr algn="ctr" indent="0" marL="0">
+                      <a:pPr marL="0" indent="0" algn="ctr">
                         <a:buNone/>
                       </a:pPr>
                       <a:r>
@@ -6556,7 +6624,7 @@
                       </a:endParaRPr>
                     </a:p>
                   </a:txBody>
-                  <a:tcPr marL="91440" marR="91440" marT="45720" marB="45720">
+                  <a:tcPr>
                     <a:lnL w="6350" cap="flat" cmpd="sng" algn="ctr">
                       <a:solidFill>
                         <a:srgbClr val="CBD5E1"/>
@@ -6603,7 +6671,7 @@
                     <a:bodyPr/>
                     <a:lstStyle/>
                     <a:p>
-                      <a:pPr indent="0" marL="0">
+                      <a:pPr marL="0" indent="0">
                         <a:buNone/>
                       </a:pPr>
                       <a:r>
@@ -6624,7 +6692,7 @@
                       </a:endParaRPr>
                     </a:p>
                   </a:txBody>
-                  <a:tcPr marL="91440" marR="91440" marT="45720" marB="45720">
+                  <a:tcPr>
                     <a:lnL w="6350" cap="flat" cmpd="sng" algn="ctr">
                       <a:solidFill>
                         <a:srgbClr val="CBD5E1"/>
@@ -6666,6 +6734,11 @@
                     </a:solidFill>
                   </a:tcPr>
                 </a:tc>
+                <a:extLst>
+                  <a:ext uri="{0D108BD9-81ED-4DB2-BD59-A6C34878D82A}">
+                    <a16:rowId xmlns:a16="http://schemas.microsoft.com/office/drawing/2014/main" val="10000"/>
+                  </a:ext>
+                </a:extLst>
               </a:tr>
               <a:tr h="320040">
                 <a:tc>
@@ -6673,7 +6746,7 @@
                     <a:bodyPr/>
                     <a:lstStyle/>
                     <a:p>
-                      <a:pPr algn="ctr" indent="0" marL="0">
+                      <a:pPr marL="0" indent="0" algn="ctr">
                         <a:buNone/>
                       </a:pPr>
                       <a:r>
@@ -6694,7 +6767,7 @@
                       </a:endParaRPr>
                     </a:p>
                   </a:txBody>
-                  <a:tcPr marL="91440" marR="91440" marT="45720" marB="45720">
+                  <a:tcPr>
                     <a:lnL w="6350" cap="flat" cmpd="sng" algn="ctr">
                       <a:solidFill>
                         <a:srgbClr val="CBD5E1"/>
@@ -6738,7 +6811,7 @@
                     <a:bodyPr/>
                     <a:lstStyle/>
                     <a:p>
-                      <a:pPr algn="ctr" indent="0" marL="0">
+                      <a:pPr marL="0" indent="0" algn="ctr">
                         <a:buNone/>
                       </a:pPr>
                       <a:r>
@@ -6759,7 +6832,7 @@
                       </a:endParaRPr>
                     </a:p>
                   </a:txBody>
-                  <a:tcPr marL="91440" marR="91440" marT="45720" marB="45720">
+                  <a:tcPr>
                     <a:lnL w="6350" cap="flat" cmpd="sng" algn="ctr">
                       <a:solidFill>
                         <a:srgbClr val="CBD5E1"/>
@@ -6803,7 +6876,7 @@
                     <a:bodyPr/>
                     <a:lstStyle/>
                     <a:p>
-                      <a:pPr indent="0" marL="0">
+                      <a:pPr marL="0" indent="0">
                         <a:buNone/>
                       </a:pPr>
                       <a:r>
@@ -6824,7 +6897,7 @@
                       </a:endParaRPr>
                     </a:p>
                   </a:txBody>
-                  <a:tcPr marL="91440" marR="91440" marT="45720" marB="45720">
+                  <a:tcPr>
                     <a:lnL w="6350" cap="flat" cmpd="sng" algn="ctr">
                       <a:solidFill>
                         <a:srgbClr val="CBD5E1"/>
@@ -6863,6 +6936,11 @@
                     </a:lnB>
                   </a:tcPr>
                 </a:tc>
+                <a:extLst>
+                  <a:ext uri="{0D108BD9-81ED-4DB2-BD59-A6C34878D82A}">
+                    <a16:rowId xmlns:a16="http://schemas.microsoft.com/office/drawing/2014/main" val="10001"/>
+                  </a:ext>
+                </a:extLst>
               </a:tr>
               <a:tr h="320040">
                 <a:tc>
@@ -6870,7 +6948,7 @@
                     <a:bodyPr/>
                     <a:lstStyle/>
                     <a:p>
-                      <a:pPr algn="ctr" indent="0" marL="0">
+                      <a:pPr marL="0" indent="0" algn="ctr">
                         <a:buNone/>
                       </a:pPr>
                       <a:r>
@@ -6891,7 +6969,7 @@
                       </a:endParaRPr>
                     </a:p>
                   </a:txBody>
-                  <a:tcPr marL="91440" marR="91440" marT="45720" marB="45720">
+                  <a:tcPr>
                     <a:lnL w="6350" cap="flat" cmpd="sng" algn="ctr">
                       <a:solidFill>
                         <a:srgbClr val="CBD5E1"/>
@@ -6935,7 +7013,7 @@
                     <a:bodyPr/>
                     <a:lstStyle/>
                     <a:p>
-                      <a:pPr algn="ctr" indent="0" marL="0">
+                      <a:pPr marL="0" indent="0" algn="ctr">
                         <a:buNone/>
                       </a:pPr>
                       <a:r>
@@ -6956,7 +7034,7 @@
                       </a:endParaRPr>
                     </a:p>
                   </a:txBody>
-                  <a:tcPr marL="91440" marR="91440" marT="45720" marB="45720">
+                  <a:tcPr>
                     <a:lnL w="6350" cap="flat" cmpd="sng" algn="ctr">
                       <a:solidFill>
                         <a:srgbClr val="CBD5E1"/>
@@ -7000,7 +7078,7 @@
                     <a:bodyPr/>
                     <a:lstStyle/>
                     <a:p>
-                      <a:pPr indent="0" marL="0">
+                      <a:pPr marL="0" indent="0">
                         <a:buNone/>
                       </a:pPr>
                       <a:r>
@@ -7021,7 +7099,7 @@
                       </a:endParaRPr>
                     </a:p>
                   </a:txBody>
-                  <a:tcPr marL="91440" marR="91440" marT="45720" marB="45720">
+                  <a:tcPr>
                     <a:lnL w="6350" cap="flat" cmpd="sng" algn="ctr">
                       <a:solidFill>
                         <a:srgbClr val="CBD5E1"/>
@@ -7060,6 +7138,11 @@
                     </a:lnB>
                   </a:tcPr>
                 </a:tc>
+                <a:extLst>
+                  <a:ext uri="{0D108BD9-81ED-4DB2-BD59-A6C34878D82A}">
+                    <a16:rowId xmlns:a16="http://schemas.microsoft.com/office/drawing/2014/main" val="10002"/>
+                  </a:ext>
+                </a:extLst>
               </a:tr>
               <a:tr h="320040">
                 <a:tc>
@@ -7067,7 +7150,7 @@
                     <a:bodyPr/>
                     <a:lstStyle/>
                     <a:p>
-                      <a:pPr algn="ctr" indent="0" marL="0">
+                      <a:pPr marL="0" indent="0" algn="ctr">
                         <a:buNone/>
                       </a:pPr>
                       <a:r>
@@ -7088,7 +7171,7 @@
                       </a:endParaRPr>
                     </a:p>
                   </a:txBody>
-                  <a:tcPr marL="91440" marR="91440" marT="45720" marB="45720">
+                  <a:tcPr>
                     <a:lnL w="6350" cap="flat" cmpd="sng" algn="ctr">
                       <a:solidFill>
                         <a:srgbClr val="CBD5E1"/>
@@ -7132,7 +7215,7 @@
                     <a:bodyPr/>
                     <a:lstStyle/>
                     <a:p>
-                      <a:pPr algn="ctr" indent="0" marL="0">
+                      <a:pPr marL="0" indent="0" algn="ctr">
                         <a:buNone/>
                       </a:pPr>
                       <a:r>
@@ -7153,7 +7236,7 @@
                       </a:endParaRPr>
                     </a:p>
                   </a:txBody>
-                  <a:tcPr marL="91440" marR="91440" marT="45720" marB="45720">
+                  <a:tcPr>
                     <a:lnL w="6350" cap="flat" cmpd="sng" algn="ctr">
                       <a:solidFill>
                         <a:srgbClr val="CBD5E1"/>
@@ -7197,7 +7280,7 @@
                     <a:bodyPr/>
                     <a:lstStyle/>
                     <a:p>
-                      <a:pPr indent="0" marL="0">
+                      <a:pPr marL="0" indent="0">
                         <a:buNone/>
                       </a:pPr>
                       <a:r>
@@ -7218,7 +7301,7 @@
                       </a:endParaRPr>
                     </a:p>
                   </a:txBody>
-                  <a:tcPr marL="91440" marR="91440" marT="45720" marB="45720">
+                  <a:tcPr>
                     <a:lnL w="6350" cap="flat" cmpd="sng" algn="ctr">
                       <a:solidFill>
                         <a:srgbClr val="CBD5E1"/>
@@ -7257,6 +7340,11 @@
                     </a:lnB>
                   </a:tcPr>
                 </a:tc>
+                <a:extLst>
+                  <a:ext uri="{0D108BD9-81ED-4DB2-BD59-A6C34878D82A}">
+                    <a16:rowId xmlns:a16="http://schemas.microsoft.com/office/drawing/2014/main" val="10003"/>
+                  </a:ext>
+                </a:extLst>
               </a:tr>
               <a:tr h="320040">
                 <a:tc>
@@ -7264,7 +7352,7 @@
                     <a:bodyPr/>
                     <a:lstStyle/>
                     <a:p>
-                      <a:pPr algn="ctr" indent="0" marL="0">
+                      <a:pPr marL="0" indent="0" algn="ctr">
                         <a:buNone/>
                       </a:pPr>
                       <a:r>
@@ -7285,7 +7373,7 @@
                       </a:endParaRPr>
                     </a:p>
                   </a:txBody>
-                  <a:tcPr marL="91440" marR="91440" marT="45720" marB="45720">
+                  <a:tcPr>
                     <a:lnL w="6350" cap="flat" cmpd="sng" algn="ctr">
                       <a:solidFill>
                         <a:srgbClr val="CBD5E1"/>
@@ -7329,7 +7417,7 @@
                     <a:bodyPr/>
                     <a:lstStyle/>
                     <a:p>
-                      <a:pPr algn="ctr" indent="0" marL="0">
+                      <a:pPr marL="0" indent="0" algn="ctr">
                         <a:buNone/>
                       </a:pPr>
                       <a:r>
@@ -7350,7 +7438,7 @@
                       </a:endParaRPr>
                     </a:p>
                   </a:txBody>
-                  <a:tcPr marL="91440" marR="91440" marT="45720" marB="45720">
+                  <a:tcPr>
                     <a:lnL w="6350" cap="flat" cmpd="sng" algn="ctr">
                       <a:solidFill>
                         <a:srgbClr val="CBD5E1"/>
@@ -7394,7 +7482,7 @@
                     <a:bodyPr/>
                     <a:lstStyle/>
                     <a:p>
-                      <a:pPr indent="0" marL="0">
+                      <a:pPr marL="0" indent="0">
                         <a:buNone/>
                       </a:pPr>
                       <a:r>
@@ -7415,7 +7503,7 @@
                       </a:endParaRPr>
                     </a:p>
                   </a:txBody>
-                  <a:tcPr marL="91440" marR="91440" marT="45720" marB="45720">
+                  <a:tcPr>
                     <a:lnL w="6350" cap="flat" cmpd="sng" algn="ctr">
                       <a:solidFill>
                         <a:srgbClr val="CBD5E1"/>
@@ -7454,6 +7542,11 @@
                     </a:lnB>
                   </a:tcPr>
                 </a:tc>
+                <a:extLst>
+                  <a:ext uri="{0D108BD9-81ED-4DB2-BD59-A6C34878D82A}">
+                    <a16:rowId xmlns:a16="http://schemas.microsoft.com/office/drawing/2014/main" val="10004"/>
+                  </a:ext>
+                </a:extLst>
               </a:tr>
             </a:tbl>
           </a:graphicData>
@@ -7480,7 +7573,7 @@
           <a:bodyPr wrap="square" rtlCol="0" anchor="ctr"/>
           <a:lstStyle/>
           <a:p>
-            <a:pPr algn="r" indent="0" marL="0">
+            <a:pPr marL="0" indent="0" algn="r">
               <a:buNone/>
             </a:pPr>
             <a:r>
@@ -7514,6 +7607,7 @@
         <a:solidFill>
           <a:srgbClr val="F8FAFC"/>
         </a:solidFill>
+        <a:effectLst/>
       </p:bgPr>
     </p:bg>
     <p:spTree>
@@ -7551,7 +7645,7 @@
           <a:bodyPr wrap="square" lIns="0" tIns="0" rIns="0" bIns="0" rtlCol="0" anchor="ctr"/>
           <a:lstStyle/>
           <a:p>
-            <a:pPr indent="0" marL="0">
+            <a:pPr marL="0" indent="0">
               <a:buNone/>
             </a:pPr>
             <a:r>
@@ -7588,6 +7682,13 @@
           </a:solidFill>
           <a:ln/>
         </p:spPr>
+        <p:txBody>
+          <a:bodyPr/>
+          <a:lstStyle/>
+          <a:p>
+            <a:endParaRPr lang="en-US"/>
+          </a:p>
+        </p:txBody>
       </p:sp>
       <p:sp>
         <p:nvSpPr>
@@ -7608,6 +7709,13 @@
           </a:solidFill>
           <a:ln/>
         </p:spPr>
+        <p:txBody>
+          <a:bodyPr/>
+          <a:lstStyle/>
+          <a:p>
+            <a:endParaRPr lang="en-US"/>
+          </a:p>
+        </p:txBody>
       </p:sp>
       <p:sp>
         <p:nvSpPr>
@@ -7630,7 +7738,7 @@
           <a:bodyPr wrap="square" rtlCol="0" anchor="ctr"/>
           <a:lstStyle/>
           <a:p>
-            <a:pPr algn="ctr" indent="0" marL="0">
+            <a:pPr marL="0" indent="0" algn="ctr">
               <a:buNone/>
             </a:pPr>
             <a:r>
@@ -7669,7 +7777,7 @@
           <a:bodyPr wrap="square" lIns="0" tIns="0" rIns="0" bIns="0" rtlCol="0" anchor="ctr"/>
           <a:lstStyle/>
           <a:p>
-            <a:pPr indent="0" marL="0">
+            <a:pPr marL="0" indent="0">
               <a:buNone/>
             </a:pPr>
             <a:r>
@@ -7706,6 +7814,13 @@
           </a:solidFill>
           <a:ln/>
         </p:spPr>
+        <p:txBody>
+          <a:bodyPr/>
+          <a:lstStyle/>
+          <a:p>
+            <a:endParaRPr lang="en-US"/>
+          </a:p>
+        </p:txBody>
       </p:sp>
       <p:sp>
         <p:nvSpPr>
@@ -7726,6 +7841,13 @@
           </a:solidFill>
           <a:ln/>
         </p:spPr>
+        <p:txBody>
+          <a:bodyPr/>
+          <a:lstStyle/>
+          <a:p>
+            <a:endParaRPr lang="en-US"/>
+          </a:p>
+        </p:txBody>
       </p:sp>
       <p:sp>
         <p:nvSpPr>
@@ -7748,7 +7870,7 @@
           <a:bodyPr wrap="square" rtlCol="0" anchor="ctr"/>
           <a:lstStyle/>
           <a:p>
-            <a:pPr algn="ctr" indent="0" marL="0">
+            <a:pPr marL="0" indent="0" algn="ctr">
               <a:buNone/>
             </a:pPr>
             <a:r>
@@ -7787,7 +7909,7 @@
           <a:bodyPr wrap="square" lIns="0" tIns="0" rIns="0" bIns="0" rtlCol="0" anchor="ctr"/>
           <a:lstStyle/>
           <a:p>
-            <a:pPr indent="0" marL="0">
+            <a:pPr marL="0" indent="0">
               <a:buNone/>
             </a:pPr>
             <a:r>
@@ -7824,6 +7946,13 @@
           </a:solidFill>
           <a:ln/>
         </p:spPr>
+        <p:txBody>
+          <a:bodyPr/>
+          <a:lstStyle/>
+          <a:p>
+            <a:endParaRPr lang="en-US"/>
+          </a:p>
+        </p:txBody>
       </p:sp>
       <p:sp>
         <p:nvSpPr>
@@ -7844,6 +7973,13 @@
           </a:solidFill>
           <a:ln/>
         </p:spPr>
+        <p:txBody>
+          <a:bodyPr/>
+          <a:lstStyle/>
+          <a:p>
+            <a:endParaRPr lang="en-US"/>
+          </a:p>
+        </p:txBody>
       </p:sp>
       <p:sp>
         <p:nvSpPr>
@@ -7866,7 +8002,7 @@
           <a:bodyPr wrap="square" rtlCol="0" anchor="ctr"/>
           <a:lstStyle/>
           <a:p>
-            <a:pPr algn="ctr" indent="0" marL="0">
+            <a:pPr marL="0" indent="0" algn="ctr">
               <a:buNone/>
             </a:pPr>
             <a:r>
@@ -7905,7 +8041,7 @@
           <a:bodyPr wrap="square" lIns="0" tIns="0" rIns="0" bIns="0" rtlCol="0" anchor="ctr"/>
           <a:lstStyle/>
           <a:p>
-            <a:pPr indent="0" marL="0">
+            <a:pPr marL="0" indent="0">
               <a:buNone/>
             </a:pPr>
             <a:r>
@@ -7942,6 +8078,13 @@
           </a:solidFill>
           <a:ln/>
         </p:spPr>
+        <p:txBody>
+          <a:bodyPr/>
+          <a:lstStyle/>
+          <a:p>
+            <a:endParaRPr lang="en-US"/>
+          </a:p>
+        </p:txBody>
       </p:sp>
       <p:sp>
         <p:nvSpPr>
@@ -7962,6 +8105,13 @@
           </a:solidFill>
           <a:ln/>
         </p:spPr>
+        <p:txBody>
+          <a:bodyPr/>
+          <a:lstStyle/>
+          <a:p>
+            <a:endParaRPr lang="en-US"/>
+          </a:p>
+        </p:txBody>
       </p:sp>
       <p:sp>
         <p:nvSpPr>
@@ -7984,7 +8134,7 @@
           <a:bodyPr wrap="square" rtlCol="0" anchor="ctr"/>
           <a:lstStyle/>
           <a:p>
-            <a:pPr algn="ctr" indent="0" marL="0">
+            <a:pPr marL="0" indent="0" algn="ctr">
               <a:buNone/>
             </a:pPr>
             <a:r>
@@ -8023,7 +8173,7 @@
           <a:bodyPr wrap="square" lIns="0" tIns="0" rIns="0" bIns="0" rtlCol="0" anchor="ctr"/>
           <a:lstStyle/>
           <a:p>
-            <a:pPr indent="0" marL="0">
+            <a:pPr marL="0" indent="0">
               <a:buNone/>
             </a:pPr>
             <a:r>
@@ -8060,6 +8210,13 @@
           </a:solidFill>
           <a:ln/>
         </p:spPr>
+        <p:txBody>
+          <a:bodyPr/>
+          <a:lstStyle/>
+          <a:p>
+            <a:endParaRPr lang="en-US"/>
+          </a:p>
+        </p:txBody>
       </p:sp>
       <p:sp>
         <p:nvSpPr>
@@ -8080,6 +8237,13 @@
           </a:solidFill>
           <a:ln/>
         </p:spPr>
+        <p:txBody>
+          <a:bodyPr/>
+          <a:lstStyle/>
+          <a:p>
+            <a:endParaRPr lang="en-US"/>
+          </a:p>
+        </p:txBody>
       </p:sp>
       <p:sp>
         <p:nvSpPr>
@@ -8102,7 +8266,7 @@
           <a:bodyPr wrap="square" rtlCol="0" anchor="ctr"/>
           <a:lstStyle/>
           <a:p>
-            <a:pPr algn="ctr" indent="0" marL="0">
+            <a:pPr marL="0" indent="0" algn="ctr">
               <a:buNone/>
             </a:pPr>
             <a:r>
@@ -8141,7 +8305,7 @@
           <a:bodyPr wrap="square" lIns="0" tIns="0" rIns="0" bIns="0" rtlCol="0" anchor="ctr"/>
           <a:lstStyle/>
           <a:p>
-            <a:pPr indent="0" marL="0">
+            <a:pPr marL="0" indent="0">
               <a:buNone/>
             </a:pPr>
             <a:r>
@@ -8178,6 +8342,13 @@
           </a:solidFill>
           <a:ln/>
         </p:spPr>
+        <p:txBody>
+          <a:bodyPr/>
+          <a:lstStyle/>
+          <a:p>
+            <a:endParaRPr lang="en-US"/>
+          </a:p>
+        </p:txBody>
       </p:sp>
       <p:sp>
         <p:nvSpPr>
@@ -8198,6 +8369,13 @@
           </a:solidFill>
           <a:ln/>
         </p:spPr>
+        <p:txBody>
+          <a:bodyPr/>
+          <a:lstStyle/>
+          <a:p>
+            <a:endParaRPr lang="en-US"/>
+          </a:p>
+        </p:txBody>
       </p:sp>
       <p:sp>
         <p:nvSpPr>
@@ -8220,7 +8398,7 @@
           <a:bodyPr wrap="square" rtlCol="0" anchor="ctr"/>
           <a:lstStyle/>
           <a:p>
-            <a:pPr algn="ctr" indent="0" marL="0">
+            <a:pPr marL="0" indent="0" algn="ctr">
               <a:buNone/>
             </a:pPr>
             <a:r>
@@ -8259,7 +8437,7 @@
           <a:bodyPr wrap="square" lIns="0" tIns="0" rIns="0" bIns="0" rtlCol="0" anchor="ctr"/>
           <a:lstStyle/>
           <a:p>
-            <a:pPr indent="0" marL="0">
+            <a:pPr marL="0" indent="0">
               <a:buNone/>
             </a:pPr>
             <a:r>
@@ -8298,7 +8476,7 @@
           <a:bodyPr wrap="square" rtlCol="0" anchor="ctr"/>
           <a:lstStyle/>
           <a:p>
-            <a:pPr algn="r" indent="0" marL="0">
+            <a:pPr marL="0" indent="0" algn="r">
               <a:buNone/>
             </a:pPr>
             <a:r>
@@ -8332,6 +8510,7 @@
         <a:solidFill>
           <a:srgbClr val="0A1420"/>
         </a:solidFill>
+        <a:effectLst/>
       </p:bgPr>
     </p:bg>
     <p:spTree>
@@ -8367,6 +8546,13 @@
           </a:solidFill>
           <a:ln/>
         </p:spPr>
+        <p:txBody>
+          <a:bodyPr/>
+          <a:lstStyle/>
+          <a:p>
+            <a:endParaRPr lang="en-US"/>
+          </a:p>
+        </p:txBody>
       </p:sp>
       <p:sp>
         <p:nvSpPr>
@@ -8389,7 +8575,7 @@
           <a:bodyPr wrap="square" lIns="0" tIns="0" rIns="0" bIns="0" rtlCol="0" anchor="ctr"/>
           <a:lstStyle/>
           <a:p>
-            <a:pPr indent="0" marL="0">
+            <a:pPr marL="0" indent="0">
               <a:buNone/>
             </a:pPr>
             <a:r>
@@ -8426,6 +8612,13 @@
           </a:solidFill>
           <a:ln/>
         </p:spPr>
+        <p:txBody>
+          <a:bodyPr/>
+          <a:lstStyle/>
+          <a:p>
+            <a:endParaRPr lang="en-US"/>
+          </a:p>
+        </p:txBody>
       </p:sp>
       <p:sp>
         <p:nvSpPr>
@@ -8448,7 +8641,7 @@
           <a:bodyPr wrap="square" rtlCol="0" anchor="ctr"/>
           <a:lstStyle/>
           <a:p>
-            <a:pPr algn="ctr" indent="0" marL="0">
+            <a:pPr marL="0" indent="0" algn="ctr">
               <a:buNone/>
             </a:pPr>
             <a:r>
@@ -8487,7 +8680,7 @@
           <a:bodyPr wrap="square" lIns="0" tIns="0" rIns="0" bIns="0" rtlCol="0" anchor="ctr"/>
           <a:lstStyle/>
           <a:p>
-            <a:pPr indent="0" marL="0">
+            <a:pPr marL="0" indent="0">
               <a:buNone/>
             </a:pPr>
             <a:r>
@@ -8524,6 +8717,13 @@
           </a:solidFill>
           <a:ln/>
         </p:spPr>
+        <p:txBody>
+          <a:bodyPr/>
+          <a:lstStyle/>
+          <a:p>
+            <a:endParaRPr lang="en-US"/>
+          </a:p>
+        </p:txBody>
       </p:sp>
       <p:sp>
         <p:nvSpPr>
@@ -8546,7 +8746,7 @@
           <a:bodyPr wrap="square" rtlCol="0" anchor="ctr"/>
           <a:lstStyle/>
           <a:p>
-            <a:pPr algn="ctr" indent="0" marL="0">
+            <a:pPr marL="0" indent="0" algn="ctr">
               <a:buNone/>
             </a:pPr>
             <a:r>
@@ -8585,7 +8785,7 @@
           <a:bodyPr wrap="square" lIns="0" tIns="0" rIns="0" bIns="0" rtlCol="0" anchor="ctr"/>
           <a:lstStyle/>
           <a:p>
-            <a:pPr indent="0" marL="0">
+            <a:pPr marL="0" indent="0">
               <a:buNone/>
             </a:pPr>
             <a:r>
@@ -8622,6 +8822,13 @@
           </a:solidFill>
           <a:ln/>
         </p:spPr>
+        <p:txBody>
+          <a:bodyPr/>
+          <a:lstStyle/>
+          <a:p>
+            <a:endParaRPr lang="en-US"/>
+          </a:p>
+        </p:txBody>
       </p:sp>
       <p:sp>
         <p:nvSpPr>
@@ -8644,7 +8851,7 @@
           <a:bodyPr wrap="square" rtlCol="0" anchor="ctr"/>
           <a:lstStyle/>
           <a:p>
-            <a:pPr algn="ctr" indent="0" marL="0">
+            <a:pPr marL="0" indent="0" algn="ctr">
               <a:buNone/>
             </a:pPr>
             <a:r>
@@ -8683,7 +8890,7 @@
           <a:bodyPr wrap="square" lIns="0" tIns="0" rIns="0" bIns="0" rtlCol="0" anchor="ctr"/>
           <a:lstStyle/>
           <a:p>
-            <a:pPr indent="0" marL="0">
+            <a:pPr marL="0" indent="0">
               <a:buNone/>
             </a:pPr>
             <a:r>
@@ -8720,6 +8927,13 @@
           </a:solidFill>
           <a:ln/>
         </p:spPr>
+        <p:txBody>
+          <a:bodyPr/>
+          <a:lstStyle/>
+          <a:p>
+            <a:endParaRPr lang="en-US"/>
+          </a:p>
+        </p:txBody>
       </p:sp>
       <p:sp>
         <p:nvSpPr>
@@ -8742,7 +8956,7 @@
           <a:bodyPr wrap="square" rtlCol="0" anchor="ctr"/>
           <a:lstStyle/>
           <a:p>
-            <a:pPr algn="ctr" indent="0" marL="0">
+            <a:pPr marL="0" indent="0" algn="ctr">
               <a:buNone/>
             </a:pPr>
             <a:r>
@@ -8781,7 +8995,7 @@
           <a:bodyPr wrap="square" lIns="0" tIns="0" rIns="0" bIns="0" rtlCol="0" anchor="ctr"/>
           <a:lstStyle/>
           <a:p>
-            <a:pPr indent="0" marL="0">
+            <a:pPr marL="0" indent="0">
               <a:buNone/>
             </a:pPr>
             <a:r>
@@ -8818,6 +9032,13 @@
           </a:solidFill>
           <a:ln/>
         </p:spPr>
+        <p:txBody>
+          <a:bodyPr/>
+          <a:lstStyle/>
+          <a:p>
+            <a:endParaRPr lang="en-US"/>
+          </a:p>
+        </p:txBody>
       </p:sp>
       <p:sp>
         <p:nvSpPr>
@@ -8840,7 +9061,7 @@
           <a:bodyPr wrap="square" rtlCol="0" anchor="ctr"/>
           <a:lstStyle/>
           <a:p>
-            <a:pPr algn="ctr" indent="0" marL="0">
+            <a:pPr marL="0" indent="0" algn="ctr">
               <a:buNone/>
             </a:pPr>
             <a:r>
@@ -8879,7 +9100,7 @@
           <a:bodyPr wrap="square" lIns="0" tIns="0" rIns="0" bIns="0" rtlCol="0" anchor="ctr"/>
           <a:lstStyle/>
           <a:p>
-            <a:pPr indent="0" marL="0">
+            <a:pPr marL="0" indent="0">
               <a:buNone/>
             </a:pPr>
             <a:r>
@@ -8916,6 +9137,13 @@
           </a:solidFill>
           <a:ln/>
         </p:spPr>
+        <p:txBody>
+          <a:bodyPr/>
+          <a:lstStyle/>
+          <a:p>
+            <a:endParaRPr lang="en-US"/>
+          </a:p>
+        </p:txBody>
       </p:sp>
       <p:sp>
         <p:nvSpPr>
@@ -8938,7 +9166,7 @@
           <a:bodyPr wrap="square" rtlCol="0" anchor="ctr"/>
           <a:lstStyle/>
           <a:p>
-            <a:pPr algn="ctr" indent="0" marL="0">
+            <a:pPr marL="0" indent="0" algn="ctr">
               <a:buNone/>
             </a:pPr>
             <a:r>
@@ -8977,7 +9205,7 @@
           <a:bodyPr wrap="square" lIns="0" tIns="0" rIns="0" bIns="0" rtlCol="0" anchor="ctr"/>
           <a:lstStyle/>
           <a:p>
-            <a:pPr indent="0" marL="0">
+            <a:pPr marL="0" indent="0">
               <a:buNone/>
             </a:pPr>
             <a:r>
@@ -9011,6 +9239,7 @@
         <a:solidFill>
           <a:srgbClr val="F8FAFC"/>
         </a:solidFill>
+        <a:effectLst/>
       </p:bgPr>
     </p:bg>
     <p:spTree>
@@ -9048,7 +9277,7 @@
           <a:bodyPr wrap="square" lIns="0" tIns="0" rIns="0" bIns="0" rtlCol="0" anchor="ctr"/>
           <a:lstStyle/>
           <a:p>
-            <a:pPr indent="0" marL="0">
+            <a:pPr marL="0" indent="0">
               <a:buNone/>
             </a:pPr>
             <a:r>
@@ -9085,13 +9314,20 @@
           </a:solidFill>
           <a:ln/>
           <a:effectLst>
-            <a:outerShdw sx="100000" sy="100000" kx="0" ky="0" algn="bl" rotWithShape="0" blurRad="76200" dist="25400" dir="8100000">
+            <a:outerShdw blurRad="76200" dist="25400" dir="8100000" algn="bl" rotWithShape="0">
               <a:srgbClr val="000000">
                 <a:alpha val="20000"/>
               </a:srgbClr>
             </a:outerShdw>
           </a:effectLst>
         </p:spPr>
+        <p:txBody>
+          <a:bodyPr/>
+          <a:lstStyle/>
+          <a:p>
+            <a:endParaRPr lang="en-US"/>
+          </a:p>
+        </p:txBody>
       </p:sp>
       <p:sp>
         <p:nvSpPr>
@@ -9112,6 +9348,13 @@
           </a:solidFill>
           <a:ln/>
         </p:spPr>
+        <p:txBody>
+          <a:bodyPr/>
+          <a:lstStyle/>
+          <a:p>
+            <a:endParaRPr lang="en-US"/>
+          </a:p>
+        </p:txBody>
       </p:sp>
       <p:sp>
         <p:nvSpPr>
@@ -9134,7 +9377,7 @@
           <a:bodyPr wrap="square" lIns="0" tIns="0" rIns="0" bIns="0" rtlCol="0" anchor="ctr"/>
           <a:lstStyle/>
           <a:p>
-            <a:pPr indent="0" marL="0">
+            <a:pPr marL="0" indent="0">
               <a:buNone/>
             </a:pPr>
             <a:r>
@@ -9173,7 +9416,7 @@
           <a:bodyPr wrap="square" rtlCol="0" anchor="t"/>
           <a:lstStyle/>
           <a:p>
-            <a:pPr indent="0" marL="0">
+            <a:pPr marL="0" indent="0">
               <a:spcAft>
                 <a:spcPts val="800"/>
               </a:spcAft>
@@ -9193,7 +9436,7 @@
             <a:endParaRPr lang="en-US" sz="1300" dirty="0"/>
           </a:p>
           <a:p>
-            <a:pPr indent="0" marL="0">
+            <a:pPr marL="0" indent="0">
               <a:spcAft>
                 <a:spcPts val="800"/>
               </a:spcAft>
@@ -9213,7 +9456,7 @@
             <a:endParaRPr lang="en-US" sz="1300" dirty="0"/>
           </a:p>
           <a:p>
-            <a:pPr indent="0" marL="0">
+            <a:pPr marL="0" indent="0">
               <a:spcAft>
                 <a:spcPts val="800"/>
               </a:spcAft>
@@ -9233,7 +9476,7 @@
             <a:endParaRPr lang="en-US" sz="1300" dirty="0"/>
           </a:p>
           <a:p>
-            <a:pPr indent="0" marL="0">
+            <a:pPr marL="0" indent="0">
               <a:buNone/>
             </a:pPr>
             <a:r>
@@ -9270,13 +9513,20 @@
           </a:solidFill>
           <a:ln/>
           <a:effectLst>
-            <a:outerShdw sx="100000" sy="100000" kx="0" ky="0" algn="bl" rotWithShape="0" blurRad="76200" dist="25400" dir="8100000">
+            <a:outerShdw blurRad="76200" dist="25400" dir="8100000" algn="bl" rotWithShape="0">
               <a:srgbClr val="000000">
                 <a:alpha val="20000"/>
               </a:srgbClr>
             </a:outerShdw>
           </a:effectLst>
         </p:spPr>
+        <p:txBody>
+          <a:bodyPr/>
+          <a:lstStyle/>
+          <a:p>
+            <a:endParaRPr lang="en-US"/>
+          </a:p>
+        </p:txBody>
       </p:sp>
       <p:sp>
         <p:nvSpPr>
@@ -9297,6 +9547,13 @@
           </a:solidFill>
           <a:ln/>
         </p:spPr>
+        <p:txBody>
+          <a:bodyPr/>
+          <a:lstStyle/>
+          <a:p>
+            <a:endParaRPr lang="en-US"/>
+          </a:p>
+        </p:txBody>
       </p:sp>
       <p:sp>
         <p:nvSpPr>
@@ -9319,7 +9576,7 @@
           <a:bodyPr wrap="square" lIns="0" tIns="0" rIns="0" bIns="0" rtlCol="0" anchor="ctr"/>
           <a:lstStyle/>
           <a:p>
-            <a:pPr indent="0" marL="0">
+            <a:pPr marL="0" indent="0">
               <a:buNone/>
             </a:pPr>
             <a:r>
@@ -9358,7 +9615,7 @@
           <a:bodyPr wrap="square" rtlCol="0" anchor="t"/>
           <a:lstStyle/>
           <a:p>
-            <a:pPr indent="0" marL="0">
+            <a:pPr marL="0" indent="0">
               <a:spcAft>
                 <a:spcPts val="800"/>
               </a:spcAft>
@@ -9523,7 +9780,7 @@
           <a:bodyPr wrap="square" rtlCol="0" anchor="ctr"/>
           <a:lstStyle/>
           <a:p>
-            <a:pPr indent="0" marL="0">
+            <a:pPr marL="0" indent="0">
               <a:buNone/>
             </a:pPr>
             <a:r>
@@ -9562,7 +9819,7 @@
           <a:bodyPr wrap="square" rtlCol="0" anchor="ctr"/>
           <a:lstStyle/>
           <a:p>
-            <a:pPr algn="r" indent="0" marL="0">
+            <a:pPr marL="0" indent="0" algn="r">
               <a:buNone/>
             </a:pPr>
             <a:r>
@@ -9596,6 +9853,7 @@
         <a:solidFill>
           <a:srgbClr val="F8FAFC"/>
         </a:solidFill>
+        <a:effectLst/>
       </p:bgPr>
     </p:bg>
     <p:spTree>
@@ -9633,7 +9891,7 @@
           <a:bodyPr wrap="square" lIns="0" tIns="0" rIns="0" bIns="0" rtlCol="0" anchor="ctr"/>
           <a:lstStyle/>
           <a:p>
-            <a:pPr indent="0" marL="0">
+            <a:pPr marL="0" indent="0">
               <a:buNone/>
             </a:pPr>
             <a:r>
@@ -9670,13 +9928,20 @@
           </a:solidFill>
           <a:ln/>
           <a:effectLst>
-            <a:outerShdw sx="100000" sy="100000" kx="0" ky="0" algn="bl" rotWithShape="0" blurRad="76200" dist="25400" dir="8100000">
+            <a:outerShdw blurRad="76200" dist="25400" dir="8100000" algn="bl" rotWithShape="0">
               <a:srgbClr val="000000">
                 <a:alpha val="20000"/>
               </a:srgbClr>
             </a:outerShdw>
           </a:effectLst>
         </p:spPr>
+        <p:txBody>
+          <a:bodyPr/>
+          <a:lstStyle/>
+          <a:p>
+            <a:endParaRPr lang="en-US"/>
+          </a:p>
+        </p:txBody>
       </p:sp>
       <p:sp>
         <p:nvSpPr>
@@ -9697,6 +9962,13 @@
           </a:solidFill>
           <a:ln/>
         </p:spPr>
+        <p:txBody>
+          <a:bodyPr/>
+          <a:lstStyle/>
+          <a:p>
+            <a:endParaRPr lang="en-US"/>
+          </a:p>
+        </p:txBody>
       </p:sp>
       <p:sp>
         <p:nvSpPr>
@@ -9719,7 +9991,7 @@
           <a:bodyPr wrap="square" rtlCol="0" anchor="ctr"/>
           <a:lstStyle/>
           <a:p>
-            <a:pPr algn="ctr" indent="0" marL="0">
+            <a:pPr marL="0" indent="0" algn="ctr">
               <a:buNone/>
             </a:pPr>
             <a:r>
@@ -9758,7 +10030,7 @@
           <a:bodyPr wrap="square" lIns="0" tIns="0" rIns="0" bIns="0" rtlCol="0" anchor="ctr"/>
           <a:lstStyle/>
           <a:p>
-            <a:pPr indent="0" marL="0">
+            <a:pPr marL="0" indent="0">
               <a:buNone/>
             </a:pPr>
             <a:r>
@@ -9797,7 +10069,7 @@
           <a:bodyPr wrap="square" lIns="0" tIns="0" rIns="0" bIns="0" rtlCol="0" anchor="ctr"/>
           <a:lstStyle/>
           <a:p>
-            <a:pPr indent="0" marL="0">
+            <a:pPr marL="0" indent="0">
               <a:buNone/>
             </a:pPr>
             <a:r>
@@ -9836,7 +10108,7 @@
           <a:bodyPr wrap="square" rtlCol="0" anchor="ctr"/>
           <a:lstStyle/>
           <a:p>
-            <a:pPr algn="ctr" indent="0" marL="0">
+            <a:pPr marL="0" indent="0" algn="ctr">
               <a:buNone/>
             </a:pPr>
             <a:r>
@@ -9873,13 +10145,20 @@
           </a:solidFill>
           <a:ln/>
           <a:effectLst>
-            <a:outerShdw sx="100000" sy="100000" kx="0" ky="0" algn="bl" rotWithShape="0" blurRad="76200" dist="25400" dir="8100000">
+            <a:outerShdw blurRad="76200" dist="25400" dir="8100000" algn="bl" rotWithShape="0">
               <a:srgbClr val="000000">
                 <a:alpha val="20000"/>
               </a:srgbClr>
             </a:outerShdw>
           </a:effectLst>
         </p:spPr>
+        <p:txBody>
+          <a:bodyPr/>
+          <a:lstStyle/>
+          <a:p>
+            <a:endParaRPr lang="en-US"/>
+          </a:p>
+        </p:txBody>
       </p:sp>
       <p:sp>
         <p:nvSpPr>
@@ -9900,6 +10179,13 @@
           </a:solidFill>
           <a:ln/>
         </p:spPr>
+        <p:txBody>
+          <a:bodyPr/>
+          <a:lstStyle/>
+          <a:p>
+            <a:endParaRPr lang="en-US"/>
+          </a:p>
+        </p:txBody>
       </p:sp>
       <p:sp>
         <p:nvSpPr>
@@ -9922,7 +10208,7 @@
           <a:bodyPr wrap="square" rtlCol="0" anchor="ctr"/>
           <a:lstStyle/>
           <a:p>
-            <a:pPr algn="ctr" indent="0" marL="0">
+            <a:pPr marL="0" indent="0" algn="ctr">
               <a:buNone/>
             </a:pPr>
             <a:r>
@@ -9961,7 +10247,7 @@
           <a:bodyPr wrap="square" lIns="0" tIns="0" rIns="0" bIns="0" rtlCol="0" anchor="ctr"/>
           <a:lstStyle/>
           <a:p>
-            <a:pPr indent="0" marL="0">
+            <a:pPr marL="0" indent="0">
               <a:buNone/>
             </a:pPr>
             <a:r>
@@ -10000,7 +10286,7 @@
           <a:bodyPr wrap="square" lIns="0" tIns="0" rIns="0" bIns="0" rtlCol="0" anchor="ctr"/>
           <a:lstStyle/>
           <a:p>
-            <a:pPr indent="0" marL="0">
+            <a:pPr marL="0" indent="0">
               <a:buNone/>
             </a:pPr>
             <a:r>
@@ -10039,7 +10325,7 @@
           <a:bodyPr wrap="square" rtlCol="0" anchor="ctr"/>
           <a:lstStyle/>
           <a:p>
-            <a:pPr algn="ctr" indent="0" marL="0">
+            <a:pPr marL="0" indent="0" algn="ctr">
               <a:buNone/>
             </a:pPr>
             <a:r>
@@ -10076,13 +10362,20 @@
           </a:solidFill>
           <a:ln/>
           <a:effectLst>
-            <a:outerShdw sx="100000" sy="100000" kx="0" ky="0" algn="bl" rotWithShape="0" blurRad="76200" dist="25400" dir="8100000">
+            <a:outerShdw blurRad="76200" dist="25400" dir="8100000" algn="bl" rotWithShape="0">
               <a:srgbClr val="000000">
                 <a:alpha val="20000"/>
               </a:srgbClr>
             </a:outerShdw>
           </a:effectLst>
         </p:spPr>
+        <p:txBody>
+          <a:bodyPr/>
+          <a:lstStyle/>
+          <a:p>
+            <a:endParaRPr lang="en-US"/>
+          </a:p>
+        </p:txBody>
       </p:sp>
       <p:sp>
         <p:nvSpPr>
@@ -10103,6 +10396,13 @@
           </a:solidFill>
           <a:ln/>
         </p:spPr>
+        <p:txBody>
+          <a:bodyPr/>
+          <a:lstStyle/>
+          <a:p>
+            <a:endParaRPr lang="en-US"/>
+          </a:p>
+        </p:txBody>
       </p:sp>
       <p:sp>
         <p:nvSpPr>
@@ -10125,7 +10425,7 @@
           <a:bodyPr wrap="square" rtlCol="0" anchor="ctr"/>
           <a:lstStyle/>
           <a:p>
-            <a:pPr algn="ctr" indent="0" marL="0">
+            <a:pPr marL="0" indent="0" algn="ctr">
               <a:buNone/>
             </a:pPr>
             <a:r>
@@ -10164,7 +10464,7 @@
           <a:bodyPr wrap="square" lIns="0" tIns="0" rIns="0" bIns="0" rtlCol="0" anchor="ctr"/>
           <a:lstStyle/>
           <a:p>
-            <a:pPr indent="0" marL="0">
+            <a:pPr marL="0" indent="0">
               <a:buNone/>
             </a:pPr>
             <a:r>
@@ -10203,7 +10503,7 @@
           <a:bodyPr wrap="square" lIns="0" tIns="0" rIns="0" bIns="0" rtlCol="0" anchor="ctr"/>
           <a:lstStyle/>
           <a:p>
-            <a:pPr indent="0" marL="0">
+            <a:pPr marL="0" indent="0">
               <a:buNone/>
             </a:pPr>
             <a:r>
@@ -10242,7 +10542,7 @@
           <a:bodyPr wrap="square" rtlCol="0" anchor="ctr"/>
           <a:lstStyle/>
           <a:p>
-            <a:pPr algn="ctr" indent="0" marL="0">
+            <a:pPr marL="0" indent="0" algn="ctr">
               <a:buNone/>
             </a:pPr>
             <a:r>
@@ -10281,7 +10581,7 @@
           <a:bodyPr wrap="square" rtlCol="0" anchor="ctr"/>
           <a:lstStyle/>
           <a:p>
-            <a:pPr algn="r" indent="0" marL="0">
+            <a:pPr marL="0" indent="0" algn="r">
               <a:buNone/>
             </a:pPr>
             <a:r>
@@ -10315,6 +10615,7 @@
         <a:solidFill>
           <a:srgbClr val="0A1420"/>
         </a:solidFill>
+        <a:effectLst/>
       </p:bgPr>
     </p:bg>
     <p:spTree>
@@ -10352,7 +10653,7 @@
           <a:bodyPr wrap="square" lIns="0" tIns="0" rIns="0" bIns="0" rtlCol="0" anchor="ctr"/>
           <a:lstStyle/>
           <a:p>
-            <a:pPr indent="0" marL="0">
+            <a:pPr marL="0" indent="0">
               <a:buNone/>
             </a:pPr>
             <a:r>
@@ -10391,7 +10692,7 @@
           <a:bodyPr wrap="square" rtlCol="0" anchor="ctr"/>
           <a:lstStyle/>
           <a:p>
-            <a:pPr indent="0" marL="0">
+            <a:pPr marL="0" indent="0">
               <a:buNone/>
             </a:pPr>
             <a:r>
@@ -10428,6 +10729,13 @@
           </a:solidFill>
           <a:ln/>
         </p:spPr>
+        <p:txBody>
+          <a:bodyPr/>
+          <a:lstStyle/>
+          <a:p>
+            <a:endParaRPr lang="en-US"/>
+          </a:p>
+        </p:txBody>
       </p:sp>
       <p:sp>
         <p:nvSpPr>
@@ -10450,7 +10758,7 @@
           <a:bodyPr wrap="square" rtlCol="0" anchor="ctr"/>
           <a:lstStyle/>
           <a:p>
-            <a:pPr algn="ctr" indent="0" marL="0">
+            <a:pPr marL="0" indent="0" algn="ctr">
               <a:buNone/>
             </a:pPr>
             <a:r>
@@ -10489,7 +10797,7 @@
           <a:bodyPr wrap="square" rtlCol="0" anchor="ctr"/>
           <a:lstStyle/>
           <a:p>
-            <a:pPr algn="ctr" indent="0" marL="0">
+            <a:pPr marL="0" indent="0" algn="ctr">
               <a:buNone/>
             </a:pPr>
             <a:r>
@@ -10526,6 +10834,13 @@
           </a:solidFill>
           <a:ln/>
         </p:spPr>
+        <p:txBody>
+          <a:bodyPr/>
+          <a:lstStyle/>
+          <a:p>
+            <a:endParaRPr lang="en-US"/>
+          </a:p>
+        </p:txBody>
       </p:sp>
       <p:sp>
         <p:nvSpPr>
@@ -10548,7 +10863,7 @@
           <a:bodyPr wrap="square" rtlCol="0" anchor="ctr"/>
           <a:lstStyle/>
           <a:p>
-            <a:pPr algn="ctr" indent="0" marL="0">
+            <a:pPr marL="0" indent="0" algn="ctr">
               <a:buNone/>
             </a:pPr>
             <a:r>
@@ -10587,7 +10902,7 @@
           <a:bodyPr wrap="square" rtlCol="0" anchor="ctr"/>
           <a:lstStyle/>
           <a:p>
-            <a:pPr algn="ctr" indent="0" marL="0">
+            <a:pPr marL="0" indent="0" algn="ctr">
               <a:buNone/>
             </a:pPr>
             <a:r>
@@ -10624,6 +10939,13 @@
           </a:solidFill>
           <a:ln/>
         </p:spPr>
+        <p:txBody>
+          <a:bodyPr/>
+          <a:lstStyle/>
+          <a:p>
+            <a:endParaRPr lang="en-US"/>
+          </a:p>
+        </p:txBody>
       </p:sp>
       <p:sp>
         <p:nvSpPr>
@@ -10646,7 +10968,7 @@
           <a:bodyPr wrap="square" rtlCol="0" anchor="ctr"/>
           <a:lstStyle/>
           <a:p>
-            <a:pPr algn="ctr" indent="0" marL="0">
+            <a:pPr marL="0" indent="0" algn="ctr">
               <a:buNone/>
             </a:pPr>
             <a:r>
@@ -10685,7 +11007,7 @@
           <a:bodyPr wrap="square" rtlCol="0" anchor="ctr"/>
           <a:lstStyle/>
           <a:p>
-            <a:pPr algn="ctr" indent="0" marL="0">
+            <a:pPr marL="0" indent="0" algn="ctr">
               <a:buNone/>
             </a:pPr>
             <a:r>
@@ -10722,6 +11044,13 @@
           </a:solidFill>
           <a:ln/>
         </p:spPr>
+        <p:txBody>
+          <a:bodyPr/>
+          <a:lstStyle/>
+          <a:p>
+            <a:endParaRPr lang="en-US"/>
+          </a:p>
+        </p:txBody>
       </p:sp>
       <p:sp>
         <p:nvSpPr>
@@ -10744,7 +11073,7 @@
           <a:bodyPr wrap="square" rtlCol="0" anchor="ctr"/>
           <a:lstStyle/>
           <a:p>
-            <a:pPr algn="ctr" indent="0" marL="0">
+            <a:pPr marL="0" indent="0" algn="ctr">
               <a:buNone/>
             </a:pPr>
             <a:r>
@@ -10783,7 +11112,7 @@
           <a:bodyPr wrap="square" rtlCol="0" anchor="ctr"/>
           <a:lstStyle/>
           <a:p>
-            <a:pPr algn="ctr" indent="0" marL="0">
+            <a:pPr marL="0" indent="0" algn="ctr">
               <a:buNone/>
             </a:pPr>
             <a:r>
@@ -10820,6 +11149,13 @@
           </a:solidFill>
           <a:ln/>
         </p:spPr>
+        <p:txBody>
+          <a:bodyPr/>
+          <a:lstStyle/>
+          <a:p>
+            <a:endParaRPr lang="en-US"/>
+          </a:p>
+        </p:txBody>
       </p:sp>
       <p:sp>
         <p:nvSpPr>
@@ -10842,7 +11178,7 @@
           <a:bodyPr wrap="square" rtlCol="0" anchor="ctr"/>
           <a:lstStyle/>
           <a:p>
-            <a:pPr algn="ctr" indent="0" marL="0">
+            <a:pPr marL="0" indent="0" algn="ctr">
               <a:buNone/>
             </a:pPr>
             <a:r>
@@ -10881,7 +11217,7 @@
           <a:bodyPr wrap="square" rtlCol="0" anchor="ctr"/>
           <a:lstStyle/>
           <a:p>
-            <a:pPr algn="ctr" indent="0" marL="0">
+            <a:pPr marL="0" indent="0" algn="ctr">
               <a:buNone/>
             </a:pPr>
             <a:r>
@@ -10918,6 +11254,13 @@
           </a:solidFill>
           <a:ln/>
         </p:spPr>
+        <p:txBody>
+          <a:bodyPr/>
+          <a:lstStyle/>
+          <a:p>
+            <a:endParaRPr lang="en-US"/>
+          </a:p>
+        </p:txBody>
       </p:sp>
       <p:sp>
         <p:nvSpPr>
@@ -10940,7 +11283,7 @@
           <a:bodyPr wrap="square" rtlCol="0" anchor="ctr"/>
           <a:lstStyle/>
           <a:p>
-            <a:pPr algn="ctr" indent="0" marL="0">
+            <a:pPr marL="0" indent="0" algn="ctr">
               <a:buNone/>
             </a:pPr>
             <a:r>
@@ -10977,6 +11320,13 @@
           </a:solidFill>
           <a:ln/>
         </p:spPr>
+        <p:txBody>
+          <a:bodyPr/>
+          <a:lstStyle/>
+          <a:p>
+            <a:endParaRPr lang="en-US"/>
+          </a:p>
+        </p:txBody>
       </p:sp>
       <p:sp>
         <p:nvSpPr>
@@ -10999,7 +11349,7 @@
           <a:bodyPr wrap="square" lIns="0" tIns="0" rIns="0" bIns="0" rtlCol="0" anchor="ctr"/>
           <a:lstStyle/>
           <a:p>
-            <a:pPr indent="0" marL="0">
+            <a:pPr marL="0" indent="0">
               <a:buNone/>
             </a:pPr>
             <a:r>
@@ -11038,7 +11388,7 @@
           <a:bodyPr wrap="square" lIns="0" tIns="0" rIns="0" bIns="0" rtlCol="0" anchor="ctr"/>
           <a:lstStyle/>
           <a:p>
-            <a:pPr indent="0" marL="0">
+            <a:pPr marL="0" indent="0">
               <a:buNone/>
             </a:pPr>
             <a:r>
@@ -11075,6 +11425,13 @@
           </a:solidFill>
           <a:ln/>
         </p:spPr>
+        <p:txBody>
+          <a:bodyPr/>
+          <a:lstStyle/>
+          <a:p>
+            <a:endParaRPr lang="en-US"/>
+          </a:p>
+        </p:txBody>
       </p:sp>
       <p:sp>
         <p:nvSpPr>
@@ -11097,7 +11454,7 @@
           <a:bodyPr wrap="square" lIns="0" tIns="0" rIns="0" bIns="0" rtlCol="0" anchor="ctr"/>
           <a:lstStyle/>
           <a:p>
-            <a:pPr indent="0" marL="0">
+            <a:pPr marL="0" indent="0">
               <a:buNone/>
             </a:pPr>
             <a:r>
@@ -11136,7 +11493,7 @@
           <a:bodyPr wrap="square" lIns="0" tIns="0" rIns="0" bIns="0" rtlCol="0" anchor="ctr"/>
           <a:lstStyle/>
           <a:p>
-            <a:pPr indent="0" marL="0">
+            <a:pPr marL="0" indent="0">
               <a:buNone/>
             </a:pPr>
             <a:r>
@@ -11173,6 +11530,13 @@
           </a:solidFill>
           <a:ln/>
         </p:spPr>
+        <p:txBody>
+          <a:bodyPr/>
+          <a:lstStyle/>
+          <a:p>
+            <a:endParaRPr lang="en-US"/>
+          </a:p>
+        </p:txBody>
       </p:sp>
       <p:sp>
         <p:nvSpPr>
@@ -11195,7 +11559,7 @@
           <a:bodyPr wrap="square" lIns="0" tIns="0" rIns="0" bIns="0" rtlCol="0" anchor="ctr"/>
           <a:lstStyle/>
           <a:p>
-            <a:pPr indent="0" marL="0">
+            <a:pPr marL="0" indent="0">
               <a:buNone/>
             </a:pPr>
             <a:r>
@@ -11234,7 +11598,7 @@
           <a:bodyPr wrap="square" lIns="0" tIns="0" rIns="0" bIns="0" rtlCol="0" anchor="ctr"/>
           <a:lstStyle/>
           <a:p>
-            <a:pPr indent="0" marL="0">
+            <a:pPr marL="0" indent="0">
               <a:buNone/>
             </a:pPr>
             <a:r>
@@ -11271,6 +11635,13 @@
           </a:solidFill>
           <a:ln/>
         </p:spPr>
+        <p:txBody>
+          <a:bodyPr/>
+          <a:lstStyle/>
+          <a:p>
+            <a:endParaRPr lang="en-US"/>
+          </a:p>
+        </p:txBody>
       </p:sp>
       <p:sp>
         <p:nvSpPr>
@@ -11293,7 +11664,7 @@
           <a:bodyPr wrap="square" rtlCol="0" anchor="ctr"/>
           <a:lstStyle/>
           <a:p>
-            <a:pPr indent="0" marL="0">
+            <a:pPr marL="0" indent="0">
               <a:buNone/>
             </a:pPr>
             <a:r>
@@ -11332,7 +11703,7 @@
           <a:bodyPr wrap="square" rtlCol="0" anchor="ctr"/>
           <a:lstStyle/>
           <a:p>
-            <a:pPr algn="r" indent="0" marL="0">
+            <a:pPr marL="0" indent="0" algn="r">
               <a:buNone/>
             </a:pPr>
             <a:r>
@@ -11366,6 +11737,7 @@
         <a:solidFill>
           <a:srgbClr val="F8FAFC"/>
         </a:solidFill>
+        <a:effectLst/>
       </p:bgPr>
     </p:bg>
     <p:spTree>
@@ -11401,6 +11773,13 @@
           </a:solidFill>
           <a:ln/>
         </p:spPr>
+        <p:txBody>
+          <a:bodyPr/>
+          <a:lstStyle/>
+          <a:p>
+            <a:endParaRPr lang="en-US"/>
+          </a:p>
+        </p:txBody>
       </p:sp>
       <p:sp>
         <p:nvSpPr>
@@ -11423,7 +11802,7 @@
           <a:bodyPr wrap="square" rtlCol="0" anchor="ctr"/>
           <a:lstStyle/>
           <a:p>
-            <a:pPr algn="ctr" indent="0" marL="0">
+            <a:pPr marL="0" indent="0" algn="ctr">
               <a:buNone/>
             </a:pPr>
             <a:r>
@@ -11462,7 +11841,7 @@
           <a:bodyPr wrap="square" lIns="0" tIns="0" rIns="0" bIns="0" rtlCol="0" anchor="ctr"/>
           <a:lstStyle/>
           <a:p>
-            <a:pPr indent="0" marL="0">
+            <a:pPr marL="0" indent="0">
               <a:buNone/>
             </a:pPr>
             <a:r>
@@ -11499,13 +11878,20 @@
           </a:solidFill>
           <a:ln/>
           <a:effectLst>
-            <a:outerShdw sx="100000" sy="100000" kx="0" ky="0" algn="bl" rotWithShape="0" blurRad="76200" dist="25400" dir="8100000">
+            <a:outerShdw blurRad="76200" dist="25400" dir="8100000" algn="bl" rotWithShape="0">
               <a:srgbClr val="000000">
                 <a:alpha val="20000"/>
               </a:srgbClr>
             </a:outerShdw>
           </a:effectLst>
         </p:spPr>
+        <p:txBody>
+          <a:bodyPr/>
+          <a:lstStyle/>
+          <a:p>
+            <a:endParaRPr lang="en-US"/>
+          </a:p>
+        </p:txBody>
       </p:sp>
       <p:sp>
         <p:nvSpPr>
@@ -11526,6 +11912,13 @@
           </a:solidFill>
           <a:ln/>
         </p:spPr>
+        <p:txBody>
+          <a:bodyPr/>
+          <a:lstStyle/>
+          <a:p>
+            <a:endParaRPr lang="en-US"/>
+          </a:p>
+        </p:txBody>
       </p:sp>
       <p:sp>
         <p:nvSpPr>
@@ -11548,7 +11941,7 @@
           <a:bodyPr wrap="square" lIns="0" tIns="0" rIns="0" bIns="0" rtlCol="0" anchor="ctr"/>
           <a:lstStyle/>
           <a:p>
-            <a:pPr indent="0" marL="0">
+            <a:pPr marL="0" indent="0">
               <a:buNone/>
             </a:pPr>
             <a:r>
@@ -11670,13 +12063,20 @@
           </a:solidFill>
           <a:ln/>
           <a:effectLst>
-            <a:outerShdw sx="100000" sy="100000" kx="0" ky="0" algn="bl" rotWithShape="0" blurRad="76200" dist="25400" dir="8100000">
+            <a:outerShdw blurRad="76200" dist="25400" dir="8100000" algn="bl" rotWithShape="0">
               <a:srgbClr val="000000">
                 <a:alpha val="20000"/>
               </a:srgbClr>
             </a:outerShdw>
           </a:effectLst>
         </p:spPr>
+        <p:txBody>
+          <a:bodyPr/>
+          <a:lstStyle/>
+          <a:p>
+            <a:endParaRPr lang="en-US"/>
+          </a:p>
+        </p:txBody>
       </p:sp>
       <p:sp>
         <p:nvSpPr>
@@ -11697,6 +12097,13 @@
           </a:solidFill>
           <a:ln/>
         </p:spPr>
+        <p:txBody>
+          <a:bodyPr/>
+          <a:lstStyle/>
+          <a:p>
+            <a:endParaRPr lang="en-US"/>
+          </a:p>
+        </p:txBody>
       </p:sp>
       <p:sp>
         <p:nvSpPr>
@@ -11719,7 +12126,7 @@
           <a:bodyPr wrap="square" lIns="0" tIns="0" rIns="0" bIns="0" rtlCol="0" anchor="ctr"/>
           <a:lstStyle/>
           <a:p>
-            <a:pPr indent="0" marL="0">
+            <a:pPr marL="0" indent="0">
               <a:buNone/>
             </a:pPr>
             <a:r>
@@ -11862,6 +12269,13 @@
           </a:solidFill>
           <a:ln/>
         </p:spPr>
+        <p:txBody>
+          <a:bodyPr/>
+          <a:lstStyle/>
+          <a:p>
+            <a:endParaRPr lang="en-US"/>
+          </a:p>
+        </p:txBody>
       </p:sp>
       <p:sp>
         <p:nvSpPr>
@@ -11884,7 +12298,7 @@
           <a:bodyPr wrap="square" rtlCol="0" anchor="ctr"/>
           <a:lstStyle/>
           <a:p>
-            <a:pPr indent="0" marL="0">
+            <a:pPr marL="0" indent="0">
               <a:buNone/>
             </a:pPr>
             <a:r>
@@ -12008,7 +12422,7 @@
           <a:bodyPr wrap="square" rtlCol="0" anchor="ctr"/>
           <a:lstStyle/>
           <a:p>
-            <a:pPr algn="r" indent="0" marL="0">
+            <a:pPr marL="0" indent="0" algn="r">
               <a:buNone/>
             </a:pPr>
             <a:r>
@@ -12042,6 +12456,7 @@
         <a:solidFill>
           <a:srgbClr val="F8FAFC"/>
         </a:solidFill>
+        <a:effectLst/>
       </p:bgPr>
     </p:bg>
     <p:spTree>
@@ -12077,6 +12492,13 @@
           </a:solidFill>
           <a:ln/>
         </p:spPr>
+        <p:txBody>
+          <a:bodyPr/>
+          <a:lstStyle/>
+          <a:p>
+            <a:endParaRPr lang="en-US"/>
+          </a:p>
+        </p:txBody>
       </p:sp>
       <p:sp>
         <p:nvSpPr>
@@ -12099,7 +12521,7 @@
           <a:bodyPr wrap="square" rtlCol="0" anchor="ctr"/>
           <a:lstStyle/>
           <a:p>
-            <a:pPr algn="ctr" indent="0" marL="0">
+            <a:pPr marL="0" indent="0" algn="ctr">
               <a:buNone/>
             </a:pPr>
             <a:r>
@@ -12138,7 +12560,7 @@
           <a:bodyPr wrap="square" lIns="0" tIns="0" rIns="0" bIns="0" rtlCol="0" anchor="ctr"/>
           <a:lstStyle/>
           <a:p>
-            <a:pPr indent="0" marL="0">
+            <a:pPr marL="0" indent="0">
               <a:buNone/>
             </a:pPr>
             <a:r>
@@ -12175,13 +12597,20 @@
           </a:solidFill>
           <a:ln/>
           <a:effectLst>
-            <a:outerShdw sx="100000" sy="100000" kx="0" ky="0" algn="bl" rotWithShape="0" blurRad="76200" dist="25400" dir="8100000">
+            <a:outerShdw blurRad="76200" dist="25400" dir="8100000" algn="bl" rotWithShape="0">
               <a:srgbClr val="000000">
                 <a:alpha val="20000"/>
               </a:srgbClr>
             </a:outerShdw>
           </a:effectLst>
         </p:spPr>
+        <p:txBody>
+          <a:bodyPr/>
+          <a:lstStyle/>
+          <a:p>
+            <a:endParaRPr lang="en-US"/>
+          </a:p>
+        </p:txBody>
       </p:sp>
       <p:sp>
         <p:nvSpPr>
@@ -12202,6 +12631,13 @@
           </a:solidFill>
           <a:ln/>
         </p:spPr>
+        <p:txBody>
+          <a:bodyPr/>
+          <a:lstStyle/>
+          <a:p>
+            <a:endParaRPr lang="en-US"/>
+          </a:p>
+        </p:txBody>
       </p:sp>
       <p:sp>
         <p:nvSpPr>
@@ -12224,7 +12660,7 @@
           <a:bodyPr wrap="square" lIns="0" tIns="0" rIns="0" bIns="0" rtlCol="0" anchor="ctr"/>
           <a:lstStyle/>
           <a:p>
-            <a:pPr indent="0" marL="0">
+            <a:pPr marL="0" indent="0">
               <a:buNone/>
             </a:pPr>
             <a:r>
@@ -12325,13 +12761,20 @@
           </a:solidFill>
           <a:ln/>
           <a:effectLst>
-            <a:outerShdw sx="100000" sy="100000" kx="0" ky="0" algn="bl" rotWithShape="0" blurRad="76200" dist="25400" dir="8100000">
+            <a:outerShdw blurRad="76200" dist="25400" dir="8100000" algn="bl" rotWithShape="0">
               <a:srgbClr val="000000">
                 <a:alpha val="20000"/>
               </a:srgbClr>
             </a:outerShdw>
           </a:effectLst>
         </p:spPr>
+        <p:txBody>
+          <a:bodyPr/>
+          <a:lstStyle/>
+          <a:p>
+            <a:endParaRPr lang="en-US"/>
+          </a:p>
+        </p:txBody>
       </p:sp>
       <p:sp>
         <p:nvSpPr>
@@ -12352,6 +12795,13 @@
           </a:solidFill>
           <a:ln/>
         </p:spPr>
+        <p:txBody>
+          <a:bodyPr/>
+          <a:lstStyle/>
+          <a:p>
+            <a:endParaRPr lang="en-US"/>
+          </a:p>
+        </p:txBody>
       </p:sp>
       <p:sp>
         <p:nvSpPr>
@@ -12374,7 +12824,7 @@
           <a:bodyPr wrap="square" lIns="0" tIns="0" rIns="0" bIns="0" rtlCol="0" anchor="ctr"/>
           <a:lstStyle/>
           <a:p>
-            <a:pPr indent="0" marL="0">
+            <a:pPr marL="0" indent="0">
               <a:buNone/>
             </a:pPr>
             <a:r>
@@ -12517,6 +12967,13 @@
           </a:solidFill>
           <a:ln/>
         </p:spPr>
+        <p:txBody>
+          <a:bodyPr/>
+          <a:lstStyle/>
+          <a:p>
+            <a:endParaRPr lang="en-US"/>
+          </a:p>
+        </p:txBody>
       </p:sp>
       <p:sp>
         <p:nvSpPr>
@@ -12539,7 +12996,7 @@
           <a:bodyPr wrap="square" rtlCol="0" anchor="ctr"/>
           <a:lstStyle/>
           <a:p>
-            <a:pPr indent="0" marL="0">
+            <a:pPr marL="0" indent="0">
               <a:buNone/>
             </a:pPr>
             <a:r>
@@ -12663,7 +13120,7 @@
           <a:bodyPr wrap="square" rtlCol="0" anchor="ctr"/>
           <a:lstStyle/>
           <a:p>
-            <a:pPr algn="r" indent="0" marL="0">
+            <a:pPr marL="0" indent="0" algn="r">
               <a:buNone/>
             </a:pPr>
             <a:r>
@@ -12697,6 +13154,7 @@
         <a:solidFill>
           <a:srgbClr val="F8FAFC"/>
         </a:solidFill>
+        <a:effectLst/>
       </p:bgPr>
     </p:bg>
     <p:spTree>
@@ -12732,6 +13190,13 @@
           </a:solidFill>
           <a:ln/>
         </p:spPr>
+        <p:txBody>
+          <a:bodyPr/>
+          <a:lstStyle/>
+          <a:p>
+            <a:endParaRPr lang="en-US"/>
+          </a:p>
+        </p:txBody>
       </p:sp>
       <p:sp>
         <p:nvSpPr>
@@ -12754,7 +13219,7 @@
           <a:bodyPr wrap="square" rtlCol="0" anchor="ctr"/>
           <a:lstStyle/>
           <a:p>
-            <a:pPr algn="ctr" indent="0" marL="0">
+            <a:pPr marL="0" indent="0" algn="ctr">
               <a:buNone/>
             </a:pPr>
             <a:r>
@@ -12793,7 +13258,7 @@
           <a:bodyPr wrap="square" lIns="0" tIns="0" rIns="0" bIns="0" rtlCol="0" anchor="ctr"/>
           <a:lstStyle/>
           <a:p>
-            <a:pPr indent="0" marL="0">
+            <a:pPr marL="0" indent="0">
               <a:buNone/>
             </a:pPr>
             <a:r>
@@ -12830,13 +13295,20 @@
           </a:solidFill>
           <a:ln/>
           <a:effectLst>
-            <a:outerShdw sx="100000" sy="100000" kx="0" ky="0" algn="bl" rotWithShape="0" blurRad="76200" dist="25400" dir="8100000">
+            <a:outerShdw blurRad="76200" dist="25400" dir="8100000" algn="bl" rotWithShape="0">
               <a:srgbClr val="000000">
                 <a:alpha val="20000"/>
               </a:srgbClr>
             </a:outerShdw>
           </a:effectLst>
         </p:spPr>
+        <p:txBody>
+          <a:bodyPr/>
+          <a:lstStyle/>
+          <a:p>
+            <a:endParaRPr lang="en-US"/>
+          </a:p>
+        </p:txBody>
       </p:sp>
       <p:sp>
         <p:nvSpPr>
@@ -12857,6 +13329,13 @@
           </a:solidFill>
           <a:ln/>
         </p:spPr>
+        <p:txBody>
+          <a:bodyPr/>
+          <a:lstStyle/>
+          <a:p>
+            <a:endParaRPr lang="en-US"/>
+          </a:p>
+        </p:txBody>
       </p:sp>
       <p:sp>
         <p:nvSpPr>
@@ -12879,7 +13358,7 @@
           <a:bodyPr wrap="square" lIns="0" tIns="0" rIns="0" bIns="0" rtlCol="0" anchor="ctr"/>
           <a:lstStyle/>
           <a:p>
-            <a:pPr indent="0" marL="0">
+            <a:pPr marL="0" indent="0">
               <a:buNone/>
             </a:pPr>
             <a:r>
@@ -13001,13 +13480,20 @@
           </a:solidFill>
           <a:ln/>
           <a:effectLst>
-            <a:outerShdw sx="100000" sy="100000" kx="0" ky="0" algn="bl" rotWithShape="0" blurRad="76200" dist="25400" dir="8100000">
+            <a:outerShdw blurRad="76200" dist="25400" dir="8100000" algn="bl" rotWithShape="0">
               <a:srgbClr val="000000">
                 <a:alpha val="20000"/>
               </a:srgbClr>
             </a:outerShdw>
           </a:effectLst>
         </p:spPr>
+        <p:txBody>
+          <a:bodyPr/>
+          <a:lstStyle/>
+          <a:p>
+            <a:endParaRPr lang="en-US"/>
+          </a:p>
+        </p:txBody>
       </p:sp>
       <p:sp>
         <p:nvSpPr>
@@ -13028,6 +13514,13 @@
           </a:solidFill>
           <a:ln/>
         </p:spPr>
+        <p:txBody>
+          <a:bodyPr/>
+          <a:lstStyle/>
+          <a:p>
+            <a:endParaRPr lang="en-US"/>
+          </a:p>
+        </p:txBody>
       </p:sp>
       <p:sp>
         <p:nvSpPr>
@@ -13050,7 +13543,7 @@
           <a:bodyPr wrap="square" lIns="0" tIns="0" rIns="0" bIns="0" rtlCol="0" anchor="ctr"/>
           <a:lstStyle/>
           <a:p>
-            <a:pPr indent="0" marL="0">
+            <a:pPr marL="0" indent="0">
               <a:buNone/>
             </a:pPr>
             <a:r>
@@ -13214,6 +13707,13 @@
           </a:solidFill>
           <a:ln/>
         </p:spPr>
+        <p:txBody>
+          <a:bodyPr/>
+          <a:lstStyle/>
+          <a:p>
+            <a:endParaRPr lang="en-US"/>
+          </a:p>
+        </p:txBody>
       </p:sp>
       <p:sp>
         <p:nvSpPr>
@@ -13236,7 +13736,7 @@
           <a:bodyPr wrap="square" rtlCol="0" anchor="ctr"/>
           <a:lstStyle/>
           <a:p>
-            <a:pPr indent="0" marL="0">
+            <a:pPr marL="0" indent="0">
               <a:buNone/>
             </a:pPr>
             <a:r>
@@ -13381,7 +13881,7 @@
           <a:bodyPr wrap="square" rtlCol="0" anchor="ctr"/>
           <a:lstStyle/>
           <a:p>
-            <a:pPr algn="r" indent="0" marL="0">
+            <a:pPr marL="0" indent="0" algn="r">
               <a:buNone/>
             </a:pPr>
             <a:r>
@@ -13415,6 +13915,7 @@
         <a:solidFill>
           <a:srgbClr val="F8FAFC"/>
         </a:solidFill>
+        <a:effectLst/>
       </p:bgPr>
     </p:bg>
     <p:spTree>
@@ -13450,6 +13951,13 @@
           </a:solidFill>
           <a:ln/>
         </p:spPr>
+        <p:txBody>
+          <a:bodyPr/>
+          <a:lstStyle/>
+          <a:p>
+            <a:endParaRPr lang="en-US"/>
+          </a:p>
+        </p:txBody>
       </p:sp>
       <p:sp>
         <p:nvSpPr>
@@ -13472,7 +13980,7 @@
           <a:bodyPr wrap="square" rtlCol="0" anchor="ctr"/>
           <a:lstStyle/>
           <a:p>
-            <a:pPr algn="ctr" indent="0" marL="0">
+            <a:pPr marL="0" indent="0" algn="ctr">
               <a:buNone/>
             </a:pPr>
             <a:r>
@@ -13511,7 +14019,7 @@
           <a:bodyPr wrap="square" lIns="0" tIns="0" rIns="0" bIns="0" rtlCol="0" anchor="ctr"/>
           <a:lstStyle/>
           <a:p>
-            <a:pPr indent="0" marL="0">
+            <a:pPr marL="0" indent="0">
               <a:buNone/>
             </a:pPr>
             <a:r>
@@ -13548,13 +14056,20 @@
           </a:solidFill>
           <a:ln/>
           <a:effectLst>
-            <a:outerShdw sx="100000" sy="100000" kx="0" ky="0" algn="bl" rotWithShape="0" blurRad="76200" dist="25400" dir="8100000">
+            <a:outerShdw blurRad="76200" dist="25400" dir="8100000" algn="bl" rotWithShape="0">
               <a:srgbClr val="000000">
                 <a:alpha val="20000"/>
               </a:srgbClr>
             </a:outerShdw>
           </a:effectLst>
         </p:spPr>
+        <p:txBody>
+          <a:bodyPr/>
+          <a:lstStyle/>
+          <a:p>
+            <a:endParaRPr lang="en-US"/>
+          </a:p>
+        </p:txBody>
       </p:sp>
       <p:sp>
         <p:nvSpPr>
@@ -13575,6 +14090,13 @@
           </a:solidFill>
           <a:ln/>
         </p:spPr>
+        <p:txBody>
+          <a:bodyPr/>
+          <a:lstStyle/>
+          <a:p>
+            <a:endParaRPr lang="en-US"/>
+          </a:p>
+        </p:txBody>
       </p:sp>
       <p:sp>
         <p:nvSpPr>
@@ -13597,7 +14119,7 @@
           <a:bodyPr wrap="square" lIns="0" tIns="0" rIns="0" bIns="0" rtlCol="0" anchor="ctr"/>
           <a:lstStyle/>
           <a:p>
-            <a:pPr indent="0" marL="0">
+            <a:pPr marL="0" indent="0">
               <a:buNone/>
             </a:pPr>
             <a:r>
@@ -13698,13 +14220,20 @@
           </a:solidFill>
           <a:ln/>
           <a:effectLst>
-            <a:outerShdw sx="100000" sy="100000" kx="0" ky="0" algn="bl" rotWithShape="0" blurRad="76200" dist="25400" dir="8100000">
+            <a:outerShdw blurRad="76200" dist="25400" dir="8100000" algn="bl" rotWithShape="0">
               <a:srgbClr val="000000">
                 <a:alpha val="20000"/>
               </a:srgbClr>
             </a:outerShdw>
           </a:effectLst>
         </p:spPr>
+        <p:txBody>
+          <a:bodyPr/>
+          <a:lstStyle/>
+          <a:p>
+            <a:endParaRPr lang="en-US"/>
+          </a:p>
+        </p:txBody>
       </p:sp>
       <p:sp>
         <p:nvSpPr>
@@ -13725,6 +14254,13 @@
           </a:solidFill>
           <a:ln/>
         </p:spPr>
+        <p:txBody>
+          <a:bodyPr/>
+          <a:lstStyle/>
+          <a:p>
+            <a:endParaRPr lang="en-US"/>
+          </a:p>
+        </p:txBody>
       </p:sp>
       <p:sp>
         <p:nvSpPr>
@@ -13747,7 +14283,7 @@
           <a:bodyPr wrap="square" lIns="0" tIns="0" rIns="0" bIns="0" rtlCol="0" anchor="ctr"/>
           <a:lstStyle/>
           <a:p>
-            <a:pPr indent="0" marL="0">
+            <a:pPr marL="0" indent="0">
               <a:buNone/>
             </a:pPr>
             <a:r>
@@ -13848,6 +14384,13 @@
           </a:solidFill>
           <a:ln/>
         </p:spPr>
+        <p:txBody>
+          <a:bodyPr/>
+          <a:lstStyle/>
+          <a:p>
+            <a:endParaRPr lang="en-US"/>
+          </a:p>
+        </p:txBody>
       </p:sp>
       <p:sp>
         <p:nvSpPr>
@@ -13870,7 +14413,7 @@
           <a:bodyPr wrap="square" rtlCol="0" anchor="ctr"/>
           <a:lstStyle/>
           <a:p>
-            <a:pPr indent="0" marL="0">
+            <a:pPr marL="0" indent="0">
               <a:buNone/>
             </a:pPr>
             <a:r>
@@ -14015,7 +14558,7 @@
           <a:bodyPr wrap="square" rtlCol="0" anchor="ctr"/>
           <a:lstStyle/>
           <a:p>
-            <a:pPr algn="r" indent="0" marL="0">
+            <a:pPr marL="0" indent="0" algn="r">
               <a:buNone/>
             </a:pPr>
             <a:r>
@@ -14049,6 +14592,7 @@
         <a:solidFill>
           <a:srgbClr val="F8FAFC"/>
         </a:solidFill>
+        <a:effectLst/>
       </p:bgPr>
     </p:bg>
     <p:spTree>
@@ -14084,6 +14628,13 @@
           </a:solidFill>
           <a:ln/>
         </p:spPr>
+        <p:txBody>
+          <a:bodyPr/>
+          <a:lstStyle/>
+          <a:p>
+            <a:endParaRPr lang="en-US"/>
+          </a:p>
+        </p:txBody>
       </p:sp>
       <p:sp>
         <p:nvSpPr>
@@ -14106,7 +14657,7 @@
           <a:bodyPr wrap="square" rtlCol="0" anchor="ctr"/>
           <a:lstStyle/>
           <a:p>
-            <a:pPr algn="ctr" indent="0" marL="0">
+            <a:pPr marL="0" indent="0" algn="ctr">
               <a:buNone/>
             </a:pPr>
             <a:r>
@@ -14145,7 +14696,7 @@
           <a:bodyPr wrap="square" lIns="0" tIns="0" rIns="0" bIns="0" rtlCol="0" anchor="ctr"/>
           <a:lstStyle/>
           <a:p>
-            <a:pPr indent="0" marL="0">
+            <a:pPr marL="0" indent="0">
               <a:buNone/>
             </a:pPr>
             <a:r>
@@ -14182,13 +14733,20 @@
           </a:solidFill>
           <a:ln/>
           <a:effectLst>
-            <a:outerShdw sx="100000" sy="100000" kx="0" ky="0" algn="bl" rotWithShape="0" blurRad="76200" dist="25400" dir="8100000">
+            <a:outerShdw blurRad="76200" dist="25400" dir="8100000" algn="bl" rotWithShape="0">
               <a:srgbClr val="000000">
                 <a:alpha val="20000"/>
               </a:srgbClr>
             </a:outerShdw>
           </a:effectLst>
         </p:spPr>
+        <p:txBody>
+          <a:bodyPr/>
+          <a:lstStyle/>
+          <a:p>
+            <a:endParaRPr lang="en-US"/>
+          </a:p>
+        </p:txBody>
       </p:sp>
       <p:sp>
         <p:nvSpPr>
@@ -14209,6 +14767,13 @@
           </a:solidFill>
           <a:ln/>
         </p:spPr>
+        <p:txBody>
+          <a:bodyPr/>
+          <a:lstStyle/>
+          <a:p>
+            <a:endParaRPr lang="en-US"/>
+          </a:p>
+        </p:txBody>
       </p:sp>
       <p:sp>
         <p:nvSpPr>
@@ -14231,7 +14796,7 @@
           <a:bodyPr wrap="square" lIns="0" tIns="0" rIns="0" bIns="0" rtlCol="0" anchor="ctr"/>
           <a:lstStyle/>
           <a:p>
-            <a:pPr indent="0" marL="0">
+            <a:pPr marL="0" indent="0">
               <a:buNone/>
             </a:pPr>
             <a:r>
@@ -14353,13 +14918,20 @@
           </a:solidFill>
           <a:ln/>
           <a:effectLst>
-            <a:outerShdw sx="100000" sy="100000" kx="0" ky="0" algn="bl" rotWithShape="0" blurRad="76200" dist="25400" dir="8100000">
+            <a:outerShdw blurRad="76200" dist="25400" dir="8100000" algn="bl" rotWithShape="0">
               <a:srgbClr val="000000">
                 <a:alpha val="20000"/>
               </a:srgbClr>
             </a:outerShdw>
           </a:effectLst>
         </p:spPr>
+        <p:txBody>
+          <a:bodyPr/>
+          <a:lstStyle/>
+          <a:p>
+            <a:endParaRPr lang="en-US"/>
+          </a:p>
+        </p:txBody>
       </p:sp>
       <p:sp>
         <p:nvSpPr>
@@ -14380,6 +14952,13 @@
           </a:solidFill>
           <a:ln/>
         </p:spPr>
+        <p:txBody>
+          <a:bodyPr/>
+          <a:lstStyle/>
+          <a:p>
+            <a:endParaRPr lang="en-US"/>
+          </a:p>
+        </p:txBody>
       </p:sp>
       <p:sp>
         <p:nvSpPr>
@@ -14402,7 +14981,7 @@
           <a:bodyPr wrap="square" lIns="0" tIns="0" rIns="0" bIns="0" rtlCol="0" anchor="ctr"/>
           <a:lstStyle/>
           <a:p>
-            <a:pPr indent="0" marL="0">
+            <a:pPr marL="0" indent="0">
               <a:buNone/>
             </a:pPr>
             <a:r>
@@ -14545,6 +15124,13 @@
           </a:solidFill>
           <a:ln/>
         </p:spPr>
+        <p:txBody>
+          <a:bodyPr/>
+          <a:lstStyle/>
+          <a:p>
+            <a:endParaRPr lang="en-US"/>
+          </a:p>
+        </p:txBody>
       </p:sp>
       <p:sp>
         <p:nvSpPr>
@@ -14567,7 +15153,7 @@
           <a:bodyPr wrap="square" rtlCol="0" anchor="ctr"/>
           <a:lstStyle/>
           <a:p>
-            <a:pPr indent="0" marL="0">
+            <a:pPr marL="0" indent="0">
               <a:buNone/>
             </a:pPr>
             <a:r>
@@ -14691,7 +15277,7 @@
           <a:bodyPr wrap="square" rtlCol="0" anchor="ctr"/>
           <a:lstStyle/>
           <a:p>
-            <a:pPr algn="r" indent="0" marL="0">
+            <a:pPr marL="0" indent="0" algn="r">
               <a:buNone/>
             </a:pPr>
             <a:r>
@@ -15010,4 +15596,319 @@
     </a:ext>
   </a:extLst>
 </a:theme>
+</file>
+
+<file path=ppt/theme/theme2.xml><?xml version="1.0" encoding="utf-8"?>
+<a:theme xmlns:a="http://schemas.openxmlformats.org/drawingml/2006/main" name="Office Theme">
+  <a:themeElements>
+    <a:clrScheme name="Office">
+      <a:dk1>
+        <a:sysClr val="windowText" lastClr="000000"/>
+      </a:dk1>
+      <a:lt1>
+        <a:sysClr val="window" lastClr="FFFFFF"/>
+      </a:lt1>
+      <a:dk2>
+        <a:srgbClr val="0E2841"/>
+      </a:dk2>
+      <a:lt2>
+        <a:srgbClr val="E8E8E8"/>
+      </a:lt2>
+      <a:accent1>
+        <a:srgbClr val="156082"/>
+      </a:accent1>
+      <a:accent2>
+        <a:srgbClr val="E97132"/>
+      </a:accent2>
+      <a:accent3>
+        <a:srgbClr val="196B24"/>
+      </a:accent3>
+      <a:accent4>
+        <a:srgbClr val="0F9ED5"/>
+      </a:accent4>
+      <a:accent5>
+        <a:srgbClr val="A02B93"/>
+      </a:accent5>
+      <a:accent6>
+        <a:srgbClr val="4EA72E"/>
+      </a:accent6>
+      <a:hlink>
+        <a:srgbClr val="467886"/>
+      </a:hlink>
+      <a:folHlink>
+        <a:srgbClr val="96607D"/>
+      </a:folHlink>
+    </a:clrScheme>
+    <a:fontScheme name="Office">
+      <a:majorFont>
+        <a:latin typeface="Aptos Display" panose="02110004020202020204"/>
+        <a:ea typeface=""/>
+        <a:cs typeface=""/>
+        <a:font script="Jpan" typeface="游ゴシック Light"/>
+        <a:font script="Hang" typeface="맑은 고딕"/>
+        <a:font script="Hans" typeface="等线 Light"/>
+        <a:font script="Hant" typeface="新細明體"/>
+        <a:font script="Arab" typeface="Times New Roman"/>
+        <a:font script="Hebr" typeface="Times New Roman"/>
+        <a:font script="Thai" typeface="Angsana New"/>
+        <a:font script="Ethi" typeface="Nyala"/>
+        <a:font script="Beng" typeface="Vrinda"/>
+        <a:font script="Gujr" typeface="Shruti"/>
+        <a:font script="Khmr" typeface="MoolBoran"/>
+        <a:font script="Knda" typeface="Tunga"/>
+        <a:font script="Guru" typeface="Raavi"/>
+        <a:font script="Cans" typeface="Euphemia"/>
+        <a:font script="Cher" typeface="Plantagenet Cherokee"/>
+        <a:font script="Yiii" typeface="Microsoft Yi Baiti"/>
+        <a:font script="Tibt" typeface="Microsoft Himalaya"/>
+        <a:font script="Thaa" typeface="MV Boli"/>
+        <a:font script="Deva" typeface="Mangal"/>
+        <a:font script="Telu" typeface="Gautami"/>
+        <a:font script="Taml" typeface="Latha"/>
+        <a:font script="Syrc" typeface="Estrangelo Edessa"/>
+        <a:font script="Orya" typeface="Kalinga"/>
+        <a:font script="Mlym" typeface="Kartika"/>
+        <a:font script="Laoo" typeface="DokChampa"/>
+        <a:font script="Sinh" typeface="Iskoola Pota"/>
+        <a:font script="Mong" typeface="Mongolian Baiti"/>
+        <a:font script="Viet" typeface="Times New Roman"/>
+        <a:font script="Uigh" typeface="Microsoft Uighur"/>
+        <a:font script="Geor" typeface="Sylfaen"/>
+        <a:font script="Armn" typeface="Arial"/>
+        <a:font script="Bugi" typeface="Leelawadee UI"/>
+        <a:font script="Bopo" typeface="Microsoft JhengHei"/>
+        <a:font script="Java" typeface="Javanese Text"/>
+        <a:font script="Lisu" typeface="Segoe UI"/>
+        <a:font script="Mymr" typeface="Myanmar Text"/>
+        <a:font script="Nkoo" typeface="Ebrima"/>
+        <a:font script="Olck" typeface="Nirmala UI"/>
+        <a:font script="Osma" typeface="Ebrima"/>
+        <a:font script="Phag" typeface="Phagspa"/>
+        <a:font script="Syrn" typeface="Estrangelo Edessa"/>
+        <a:font script="Syrj" typeface="Estrangelo Edessa"/>
+        <a:font script="Syre" typeface="Estrangelo Edessa"/>
+        <a:font script="Sora" typeface="Nirmala UI"/>
+        <a:font script="Tale" typeface="Microsoft Tai Le"/>
+        <a:font script="Talu" typeface="Microsoft New Tai Lue"/>
+        <a:font script="Tfng" typeface="Ebrima"/>
+      </a:majorFont>
+      <a:minorFont>
+        <a:latin typeface="Aptos" panose="02110004020202020204"/>
+        <a:ea typeface=""/>
+        <a:cs typeface=""/>
+        <a:font script="Jpan" typeface="游ゴシック"/>
+        <a:font script="Hang" typeface="맑은 고딕"/>
+        <a:font script="Hans" typeface="等线"/>
+        <a:font script="Hant" typeface="新細明體"/>
+        <a:font script="Arab" typeface="Arial"/>
+        <a:font script="Hebr" typeface="Arial"/>
+        <a:font script="Thai" typeface="Cordia New"/>
+        <a:font script="Ethi" typeface="Nyala"/>
+        <a:font script="Beng" typeface="Vrinda"/>
+        <a:font script="Gujr" typeface="Shruti"/>
+        <a:font script="Khmr" typeface="DaunPenh"/>
+        <a:font script="Knda" typeface="Tunga"/>
+        <a:font script="Guru" typeface="Raavi"/>
+        <a:font script="Cans" typeface="Euphemia"/>
+        <a:font script="Cher" typeface="Plantagenet Cherokee"/>
+        <a:font script="Yiii" typeface="Microsoft Yi Baiti"/>
+        <a:font script="Tibt" typeface="Microsoft Himalaya"/>
+        <a:font script="Thaa" typeface="MV Boli"/>
+        <a:font script="Deva" typeface="Mangal"/>
+        <a:font script="Telu" typeface="Gautami"/>
+        <a:font script="Taml" typeface="Latha"/>
+        <a:font script="Syrc" typeface="Estrangelo Edessa"/>
+        <a:font script="Orya" typeface="Kalinga"/>
+        <a:font script="Mlym" typeface="Kartika"/>
+        <a:font script="Laoo" typeface="DokChampa"/>
+        <a:font script="Sinh" typeface="Iskoola Pota"/>
+        <a:font script="Mong" typeface="Mongolian Baiti"/>
+        <a:font script="Viet" typeface="Arial"/>
+        <a:font script="Uigh" typeface="Microsoft Uighur"/>
+        <a:font script="Geor" typeface="Sylfaen"/>
+        <a:font script="Armn" typeface="Arial"/>
+        <a:font script="Bugi" typeface="Leelawadee UI"/>
+        <a:font script="Bopo" typeface="Microsoft JhengHei"/>
+        <a:font script="Java" typeface="Javanese Text"/>
+        <a:font script="Lisu" typeface="Segoe UI"/>
+        <a:font script="Mymr" typeface="Myanmar Text"/>
+        <a:font script="Nkoo" typeface="Ebrima"/>
+        <a:font script="Olck" typeface="Nirmala UI"/>
+        <a:font script="Osma" typeface="Ebrima"/>
+        <a:font script="Phag" typeface="Phagspa"/>
+        <a:font script="Syrn" typeface="Estrangelo Edessa"/>
+        <a:font script="Syrj" typeface="Estrangelo Edessa"/>
+        <a:font script="Syre" typeface="Estrangelo Edessa"/>
+        <a:font script="Sora" typeface="Nirmala UI"/>
+        <a:font script="Tale" typeface="Microsoft Tai Le"/>
+        <a:font script="Talu" typeface="Microsoft New Tai Lue"/>
+        <a:font script="Tfng" typeface="Ebrima"/>
+      </a:minorFont>
+    </a:fontScheme>
+    <a:fmtScheme name="Office">
+      <a:fillStyleLst>
+        <a:solidFill>
+          <a:schemeClr val="phClr"/>
+        </a:solidFill>
+        <a:gradFill rotWithShape="1">
+          <a:gsLst>
+            <a:gs pos="0">
+              <a:schemeClr val="phClr">
+                <a:lumMod val="110000"/>
+                <a:satMod val="105000"/>
+                <a:tint val="67000"/>
+              </a:schemeClr>
+            </a:gs>
+            <a:gs pos="50000">
+              <a:schemeClr val="phClr">
+                <a:lumMod val="105000"/>
+                <a:satMod val="103000"/>
+                <a:tint val="73000"/>
+              </a:schemeClr>
+            </a:gs>
+            <a:gs pos="100000">
+              <a:schemeClr val="phClr">
+                <a:lumMod val="105000"/>
+                <a:satMod val="109000"/>
+                <a:tint val="81000"/>
+              </a:schemeClr>
+            </a:gs>
+          </a:gsLst>
+          <a:lin ang="5400000" scaled="0"/>
+        </a:gradFill>
+        <a:gradFill rotWithShape="1">
+          <a:gsLst>
+            <a:gs pos="0">
+              <a:schemeClr val="phClr">
+                <a:satMod val="103000"/>
+                <a:lumMod val="102000"/>
+                <a:tint val="94000"/>
+              </a:schemeClr>
+            </a:gs>
+            <a:gs pos="50000">
+              <a:schemeClr val="phClr">
+                <a:satMod val="110000"/>
+                <a:lumMod val="100000"/>
+                <a:shade val="100000"/>
+              </a:schemeClr>
+            </a:gs>
+            <a:gs pos="100000">
+              <a:schemeClr val="phClr">
+                <a:lumMod val="99000"/>
+                <a:satMod val="120000"/>
+                <a:shade val="78000"/>
+              </a:schemeClr>
+            </a:gs>
+          </a:gsLst>
+          <a:lin ang="5400000" scaled="0"/>
+        </a:gradFill>
+      </a:fillStyleLst>
+      <a:lnStyleLst>
+        <a:ln w="12700" cap="flat" cmpd="sng" algn="ctr">
+          <a:solidFill>
+            <a:schemeClr val="phClr"/>
+          </a:solidFill>
+          <a:prstDash val="solid"/>
+          <a:miter lim="800000"/>
+        </a:ln>
+        <a:ln w="19050" cap="flat" cmpd="sng" algn="ctr">
+          <a:solidFill>
+            <a:schemeClr val="phClr"/>
+          </a:solidFill>
+          <a:prstDash val="solid"/>
+          <a:miter lim="800000"/>
+        </a:ln>
+        <a:ln w="25400" cap="flat" cmpd="sng" algn="ctr">
+          <a:solidFill>
+            <a:schemeClr val="phClr"/>
+          </a:solidFill>
+          <a:prstDash val="solid"/>
+          <a:miter lim="800000"/>
+        </a:ln>
+      </a:lnStyleLst>
+      <a:effectStyleLst>
+        <a:effectStyle>
+          <a:effectLst/>
+        </a:effectStyle>
+        <a:effectStyle>
+          <a:effectLst/>
+        </a:effectStyle>
+        <a:effectStyle>
+          <a:effectLst>
+            <a:outerShdw blurRad="57150" dist="19050" dir="5400000" algn="ctr" rotWithShape="0">
+              <a:srgbClr val="000000">
+                <a:alpha val="63000"/>
+              </a:srgbClr>
+            </a:outerShdw>
+          </a:effectLst>
+        </a:effectStyle>
+      </a:effectStyleLst>
+      <a:bgFillStyleLst>
+        <a:solidFill>
+          <a:schemeClr val="phClr"/>
+        </a:solidFill>
+        <a:solidFill>
+          <a:schemeClr val="phClr">
+            <a:tint val="95000"/>
+            <a:satMod val="170000"/>
+          </a:schemeClr>
+        </a:solidFill>
+        <a:gradFill rotWithShape="1">
+          <a:gsLst>
+            <a:gs pos="0">
+              <a:schemeClr val="phClr">
+                <a:tint val="93000"/>
+                <a:satMod val="150000"/>
+                <a:shade val="98000"/>
+                <a:lumMod val="102000"/>
+              </a:schemeClr>
+            </a:gs>
+            <a:gs pos="50000">
+              <a:schemeClr val="phClr">
+                <a:tint val="98000"/>
+                <a:satMod val="130000"/>
+                <a:shade val="90000"/>
+                <a:lumMod val="103000"/>
+              </a:schemeClr>
+            </a:gs>
+            <a:gs pos="100000">
+              <a:schemeClr val="phClr">
+                <a:shade val="63000"/>
+                <a:satMod val="120000"/>
+              </a:schemeClr>
+            </a:gs>
+          </a:gsLst>
+          <a:lin ang="5400000" scaled="0"/>
+        </a:gradFill>
+      </a:bgFillStyleLst>
+    </a:fmtScheme>
+  </a:themeElements>
+  <a:objectDefaults>
+    <a:lnDef>
+      <a:spPr/>
+      <a:bodyPr/>
+      <a:lstStyle/>
+      <a:style>
+        <a:lnRef idx="2">
+          <a:schemeClr val="accent1"/>
+        </a:lnRef>
+        <a:fillRef idx="0">
+          <a:schemeClr val="accent1"/>
+        </a:fillRef>
+        <a:effectRef idx="1">
+          <a:schemeClr val="accent1"/>
+        </a:effectRef>
+        <a:fontRef idx="minor">
+          <a:schemeClr val="tx1"/>
+        </a:fontRef>
+      </a:style>
+    </a:lnDef>
+  </a:objectDefaults>
+  <a:extraClrSchemeLst/>
+  <a:extLst>
+    <a:ext uri="{05A4C25C-085E-4340-85A3-A5531E510DB2}">
+      <thm15:themeFamily xmlns:thm15="http://schemas.microsoft.com/office/thememl/2012/main" name="Office Theme" id="{2E142A2C-CD16-42D6-873A-C26D2A0506FA}" vid="{1BDDFF52-6CD6-40A5-AB3C-68EB2F1E4D0A}"/>
+    </a:ext>
+  </a:extLst>
+</a:theme>
 </file>